--- a/Data/PPT_Learn/PPT_File/18.pptx
+++ b/Data/PPT_Learn/PPT_File/18.pptx
@@ -6,13 +6,12 @@
   </p:sldMasterIdLst>
   <p:sldIdLst>
     <p:sldId id="256" r:id="rId2"/>
-    <p:sldId id="259" r:id="rId3"/>
+    <p:sldId id="257" r:id="rId3"/>
     <p:sldId id="261" r:id="rId4"/>
     <p:sldId id="262" r:id="rId5"/>
     <p:sldId id="263" r:id="rId6"/>
     <p:sldId id="260" r:id="rId7"/>
     <p:sldId id="258" r:id="rId8"/>
-    <p:sldId id="257" r:id="rId9"/>
   </p:sldIdLst>
   <p:sldSz cx="12192000" cy="6858000"/>
   <p:notesSz cx="6858000" cy="9144000"/>
@@ -141,7 +140,7 @@
           <p:cNvPr id="2" name="Title 1">
             <a:extLst>
               <a:ext uri="{FF2B5EF4-FFF2-40B4-BE49-F238E27FC236}">
-                <a16:creationId xmlns="" xmlns:a16="http://schemas.microsoft.com/office/drawing/2014/main" id="{76568443-6AB2-9DB8-5EA5-BDFD1DB95BD4}"/>
+                <a16:creationId xmlns:a16="http://schemas.microsoft.com/office/drawing/2014/main" id="{76568443-6AB2-9DB8-5EA5-BDFD1DB95BD4}"/>
               </a:ext>
             </a:extLst>
           </p:cNvPr>
@@ -178,7 +177,7 @@
           <p:cNvPr id="3" name="Subtitle 2">
             <a:extLst>
               <a:ext uri="{FF2B5EF4-FFF2-40B4-BE49-F238E27FC236}">
-                <a16:creationId xmlns="" xmlns:a16="http://schemas.microsoft.com/office/drawing/2014/main" id="{0D09753A-2AA9-A433-EF9C-E9D5D1DB22FD}"/>
+                <a16:creationId xmlns:a16="http://schemas.microsoft.com/office/drawing/2014/main" id="{0D09753A-2AA9-A433-EF9C-E9D5D1DB22FD}"/>
               </a:ext>
             </a:extLst>
           </p:cNvPr>
@@ -248,7 +247,7 @@
           <p:cNvPr id="4" name="Date Placeholder 3">
             <a:extLst>
               <a:ext uri="{FF2B5EF4-FFF2-40B4-BE49-F238E27FC236}">
-                <a16:creationId xmlns="" xmlns:a16="http://schemas.microsoft.com/office/drawing/2014/main" id="{92BA1051-F59F-532C-9F7C-C383F7303642}"/>
+                <a16:creationId xmlns:a16="http://schemas.microsoft.com/office/drawing/2014/main" id="{92BA1051-F59F-532C-9F7C-C383F7303642}"/>
               </a:ext>
             </a:extLst>
           </p:cNvPr>
@@ -266,7 +265,7 @@
           <a:p>
             <a:fld id="{D1C9F4E3-D04A-4E30-BA68-CF0B4003FE5F}" type="datetimeFigureOut">
               <a:rPr lang="en-US" smtClean="0"/>
-              <a:t>13-02-2024</a:t>
+              <a:t>12/7/2025</a:t>
             </a:fld>
             <a:endParaRPr lang="en-US"/>
           </a:p>
@@ -277,7 +276,7 @@
           <p:cNvPr id="5" name="Footer Placeholder 4">
             <a:extLst>
               <a:ext uri="{FF2B5EF4-FFF2-40B4-BE49-F238E27FC236}">
-                <a16:creationId xmlns="" xmlns:a16="http://schemas.microsoft.com/office/drawing/2014/main" id="{AC45B24D-9CB0-AF56-E931-52F4B4CE67D2}"/>
+                <a16:creationId xmlns:a16="http://schemas.microsoft.com/office/drawing/2014/main" id="{AC45B24D-9CB0-AF56-E931-52F4B4CE67D2}"/>
               </a:ext>
             </a:extLst>
           </p:cNvPr>
@@ -302,7 +301,7 @@
           <p:cNvPr id="6" name="Slide Number Placeholder 5">
             <a:extLst>
               <a:ext uri="{FF2B5EF4-FFF2-40B4-BE49-F238E27FC236}">
-                <a16:creationId xmlns="" xmlns:a16="http://schemas.microsoft.com/office/drawing/2014/main" id="{4C0436BA-1A7E-D4A3-E30B-D315020C0A6B}"/>
+                <a16:creationId xmlns:a16="http://schemas.microsoft.com/office/drawing/2014/main" id="{4C0436BA-1A7E-D4A3-E30B-D315020C0A6B}"/>
               </a:ext>
             </a:extLst>
           </p:cNvPr>
@@ -361,7 +360,7 @@
           <p:cNvPr id="2" name="Title 1">
             <a:extLst>
               <a:ext uri="{FF2B5EF4-FFF2-40B4-BE49-F238E27FC236}">
-                <a16:creationId xmlns="" xmlns:a16="http://schemas.microsoft.com/office/drawing/2014/main" id="{4DA9D9DD-9605-C7E9-0B4B-B0E7703FC131}"/>
+                <a16:creationId xmlns:a16="http://schemas.microsoft.com/office/drawing/2014/main" id="{4DA9D9DD-9605-C7E9-0B4B-B0E7703FC131}"/>
               </a:ext>
             </a:extLst>
           </p:cNvPr>
@@ -389,7 +388,7 @@
           <p:cNvPr id="3" name="Vertical Text Placeholder 2">
             <a:extLst>
               <a:ext uri="{FF2B5EF4-FFF2-40B4-BE49-F238E27FC236}">
-                <a16:creationId xmlns="" xmlns:a16="http://schemas.microsoft.com/office/drawing/2014/main" id="{54C90D1C-9F03-317D-0893-402C2BD805CB}"/>
+                <a16:creationId xmlns:a16="http://schemas.microsoft.com/office/drawing/2014/main" id="{54C90D1C-9F03-317D-0893-402C2BD805CB}"/>
               </a:ext>
             </a:extLst>
           </p:cNvPr>
@@ -446,7 +445,7 @@
           <p:cNvPr id="4" name="Date Placeholder 3">
             <a:extLst>
               <a:ext uri="{FF2B5EF4-FFF2-40B4-BE49-F238E27FC236}">
-                <a16:creationId xmlns="" xmlns:a16="http://schemas.microsoft.com/office/drawing/2014/main" id="{9D21B98D-9F18-2D7A-1904-6CA3807E7D5D}"/>
+                <a16:creationId xmlns:a16="http://schemas.microsoft.com/office/drawing/2014/main" id="{9D21B98D-9F18-2D7A-1904-6CA3807E7D5D}"/>
               </a:ext>
             </a:extLst>
           </p:cNvPr>
@@ -464,7 +463,7 @@
           <a:p>
             <a:fld id="{D1C9F4E3-D04A-4E30-BA68-CF0B4003FE5F}" type="datetimeFigureOut">
               <a:rPr lang="en-US" smtClean="0"/>
-              <a:t>13-02-2024</a:t>
+              <a:t>12/7/2025</a:t>
             </a:fld>
             <a:endParaRPr lang="en-US"/>
           </a:p>
@@ -475,7 +474,7 @@
           <p:cNvPr id="5" name="Footer Placeholder 4">
             <a:extLst>
               <a:ext uri="{FF2B5EF4-FFF2-40B4-BE49-F238E27FC236}">
-                <a16:creationId xmlns="" xmlns:a16="http://schemas.microsoft.com/office/drawing/2014/main" id="{A782CC4C-69F0-6870-18B0-D3F1260046FF}"/>
+                <a16:creationId xmlns:a16="http://schemas.microsoft.com/office/drawing/2014/main" id="{A782CC4C-69F0-6870-18B0-D3F1260046FF}"/>
               </a:ext>
             </a:extLst>
           </p:cNvPr>
@@ -500,7 +499,7 @@
           <p:cNvPr id="6" name="Slide Number Placeholder 5">
             <a:extLst>
               <a:ext uri="{FF2B5EF4-FFF2-40B4-BE49-F238E27FC236}">
-                <a16:creationId xmlns="" xmlns:a16="http://schemas.microsoft.com/office/drawing/2014/main" id="{26D1B596-68E0-289A-EEF0-5986DBCDB36F}"/>
+                <a16:creationId xmlns:a16="http://schemas.microsoft.com/office/drawing/2014/main" id="{26D1B596-68E0-289A-EEF0-5986DBCDB36F}"/>
               </a:ext>
             </a:extLst>
           </p:cNvPr>
@@ -559,7 +558,7 @@
           <p:cNvPr id="2" name="Vertical Title 1">
             <a:extLst>
               <a:ext uri="{FF2B5EF4-FFF2-40B4-BE49-F238E27FC236}">
-                <a16:creationId xmlns="" xmlns:a16="http://schemas.microsoft.com/office/drawing/2014/main" id="{D9481125-F5E0-669C-8A13-CCE768745760}"/>
+                <a16:creationId xmlns:a16="http://schemas.microsoft.com/office/drawing/2014/main" id="{D9481125-F5E0-669C-8A13-CCE768745760}"/>
               </a:ext>
             </a:extLst>
           </p:cNvPr>
@@ -592,7 +591,7 @@
           <p:cNvPr id="3" name="Vertical Text Placeholder 2">
             <a:extLst>
               <a:ext uri="{FF2B5EF4-FFF2-40B4-BE49-F238E27FC236}">
-                <a16:creationId xmlns="" xmlns:a16="http://schemas.microsoft.com/office/drawing/2014/main" id="{FB04BABC-604A-885D-0EC7-1035D2FE9725}"/>
+                <a16:creationId xmlns:a16="http://schemas.microsoft.com/office/drawing/2014/main" id="{FB04BABC-604A-885D-0EC7-1035D2FE9725}"/>
               </a:ext>
             </a:extLst>
           </p:cNvPr>
@@ -654,7 +653,7 @@
           <p:cNvPr id="4" name="Date Placeholder 3">
             <a:extLst>
               <a:ext uri="{FF2B5EF4-FFF2-40B4-BE49-F238E27FC236}">
-                <a16:creationId xmlns="" xmlns:a16="http://schemas.microsoft.com/office/drawing/2014/main" id="{2F4D2AC1-7490-3945-17EF-E472424E116A}"/>
+                <a16:creationId xmlns:a16="http://schemas.microsoft.com/office/drawing/2014/main" id="{2F4D2AC1-7490-3945-17EF-E472424E116A}"/>
               </a:ext>
             </a:extLst>
           </p:cNvPr>
@@ -672,7 +671,7 @@
           <a:p>
             <a:fld id="{D1C9F4E3-D04A-4E30-BA68-CF0B4003FE5F}" type="datetimeFigureOut">
               <a:rPr lang="en-US" smtClean="0"/>
-              <a:t>13-02-2024</a:t>
+              <a:t>12/7/2025</a:t>
             </a:fld>
             <a:endParaRPr lang="en-US"/>
           </a:p>
@@ -683,7 +682,7 @@
           <p:cNvPr id="5" name="Footer Placeholder 4">
             <a:extLst>
               <a:ext uri="{FF2B5EF4-FFF2-40B4-BE49-F238E27FC236}">
-                <a16:creationId xmlns="" xmlns:a16="http://schemas.microsoft.com/office/drawing/2014/main" id="{E68D8C8E-74A6-6781-EE9B-44986FA94EF6}"/>
+                <a16:creationId xmlns:a16="http://schemas.microsoft.com/office/drawing/2014/main" id="{E68D8C8E-74A6-6781-EE9B-44986FA94EF6}"/>
               </a:ext>
             </a:extLst>
           </p:cNvPr>
@@ -708,7 +707,7 @@
           <p:cNvPr id="6" name="Slide Number Placeholder 5">
             <a:extLst>
               <a:ext uri="{FF2B5EF4-FFF2-40B4-BE49-F238E27FC236}">
-                <a16:creationId xmlns="" xmlns:a16="http://schemas.microsoft.com/office/drawing/2014/main" id="{F49D9D26-DA4C-4C80-23FB-E2B912BFE654}"/>
+                <a16:creationId xmlns:a16="http://schemas.microsoft.com/office/drawing/2014/main" id="{F49D9D26-DA4C-4C80-23FB-E2B912BFE654}"/>
               </a:ext>
             </a:extLst>
           </p:cNvPr>
@@ -767,7 +766,7 @@
           <p:cNvPr id="2" name="Title 1">
             <a:extLst>
               <a:ext uri="{FF2B5EF4-FFF2-40B4-BE49-F238E27FC236}">
-                <a16:creationId xmlns="" xmlns:a16="http://schemas.microsoft.com/office/drawing/2014/main" id="{C77876DF-6360-026D-7E14-3C1C33C5A639}"/>
+                <a16:creationId xmlns:a16="http://schemas.microsoft.com/office/drawing/2014/main" id="{C77876DF-6360-026D-7E14-3C1C33C5A639}"/>
               </a:ext>
             </a:extLst>
           </p:cNvPr>
@@ -795,7 +794,7 @@
           <p:cNvPr id="3" name="Content Placeholder 2">
             <a:extLst>
               <a:ext uri="{FF2B5EF4-FFF2-40B4-BE49-F238E27FC236}">
-                <a16:creationId xmlns="" xmlns:a16="http://schemas.microsoft.com/office/drawing/2014/main" id="{45FCC94E-F677-6BFD-627F-382084D700CA}"/>
+                <a16:creationId xmlns:a16="http://schemas.microsoft.com/office/drawing/2014/main" id="{45FCC94E-F677-6BFD-627F-382084D700CA}"/>
               </a:ext>
             </a:extLst>
           </p:cNvPr>
@@ -852,7 +851,7 @@
           <p:cNvPr id="4" name="Date Placeholder 3">
             <a:extLst>
               <a:ext uri="{FF2B5EF4-FFF2-40B4-BE49-F238E27FC236}">
-                <a16:creationId xmlns="" xmlns:a16="http://schemas.microsoft.com/office/drawing/2014/main" id="{A6751D25-1544-02D7-802A-6270411A0359}"/>
+                <a16:creationId xmlns:a16="http://schemas.microsoft.com/office/drawing/2014/main" id="{A6751D25-1544-02D7-802A-6270411A0359}"/>
               </a:ext>
             </a:extLst>
           </p:cNvPr>
@@ -870,7 +869,7 @@
           <a:p>
             <a:fld id="{D1C9F4E3-D04A-4E30-BA68-CF0B4003FE5F}" type="datetimeFigureOut">
               <a:rPr lang="en-US" smtClean="0"/>
-              <a:t>13-02-2024</a:t>
+              <a:t>12/7/2025</a:t>
             </a:fld>
             <a:endParaRPr lang="en-US"/>
           </a:p>
@@ -881,7 +880,7 @@
           <p:cNvPr id="5" name="Footer Placeholder 4">
             <a:extLst>
               <a:ext uri="{FF2B5EF4-FFF2-40B4-BE49-F238E27FC236}">
-                <a16:creationId xmlns="" xmlns:a16="http://schemas.microsoft.com/office/drawing/2014/main" id="{CA1FA3A1-A4FE-3772-7F7F-D20A813032BF}"/>
+                <a16:creationId xmlns:a16="http://schemas.microsoft.com/office/drawing/2014/main" id="{CA1FA3A1-A4FE-3772-7F7F-D20A813032BF}"/>
               </a:ext>
             </a:extLst>
           </p:cNvPr>
@@ -906,7 +905,7 @@
           <p:cNvPr id="6" name="Slide Number Placeholder 5">
             <a:extLst>
               <a:ext uri="{FF2B5EF4-FFF2-40B4-BE49-F238E27FC236}">
-                <a16:creationId xmlns="" xmlns:a16="http://schemas.microsoft.com/office/drawing/2014/main" id="{404A0B25-CE65-45B6-E374-049C9CEA35D9}"/>
+                <a16:creationId xmlns:a16="http://schemas.microsoft.com/office/drawing/2014/main" id="{404A0B25-CE65-45B6-E374-049C9CEA35D9}"/>
               </a:ext>
             </a:extLst>
           </p:cNvPr>
@@ -965,7 +964,7 @@
           <p:cNvPr id="2" name="Title 1">
             <a:extLst>
               <a:ext uri="{FF2B5EF4-FFF2-40B4-BE49-F238E27FC236}">
-                <a16:creationId xmlns="" xmlns:a16="http://schemas.microsoft.com/office/drawing/2014/main" id="{E2B63018-4108-F584-88FE-8DC1D602A499}"/>
+                <a16:creationId xmlns:a16="http://schemas.microsoft.com/office/drawing/2014/main" id="{E2B63018-4108-F584-88FE-8DC1D602A499}"/>
               </a:ext>
             </a:extLst>
           </p:cNvPr>
@@ -1002,7 +1001,7 @@
           <p:cNvPr id="3" name="Text Placeholder 2">
             <a:extLst>
               <a:ext uri="{FF2B5EF4-FFF2-40B4-BE49-F238E27FC236}">
-                <a16:creationId xmlns="" xmlns:a16="http://schemas.microsoft.com/office/drawing/2014/main" id="{D87BDFC2-408A-F7AA-9BE8-563411985B89}"/>
+                <a16:creationId xmlns:a16="http://schemas.microsoft.com/office/drawing/2014/main" id="{D87BDFC2-408A-F7AA-9BE8-563411985B89}"/>
               </a:ext>
             </a:extLst>
           </p:cNvPr>
@@ -1127,7 +1126,7 @@
           <p:cNvPr id="4" name="Date Placeholder 3">
             <a:extLst>
               <a:ext uri="{FF2B5EF4-FFF2-40B4-BE49-F238E27FC236}">
-                <a16:creationId xmlns="" xmlns:a16="http://schemas.microsoft.com/office/drawing/2014/main" id="{123A0520-93AD-716A-FCBE-AC3552813CC5}"/>
+                <a16:creationId xmlns:a16="http://schemas.microsoft.com/office/drawing/2014/main" id="{123A0520-93AD-716A-FCBE-AC3552813CC5}"/>
               </a:ext>
             </a:extLst>
           </p:cNvPr>
@@ -1145,7 +1144,7 @@
           <a:p>
             <a:fld id="{D1C9F4E3-D04A-4E30-BA68-CF0B4003FE5F}" type="datetimeFigureOut">
               <a:rPr lang="en-US" smtClean="0"/>
-              <a:t>13-02-2024</a:t>
+              <a:t>12/7/2025</a:t>
             </a:fld>
             <a:endParaRPr lang="en-US"/>
           </a:p>
@@ -1156,7 +1155,7 @@
           <p:cNvPr id="5" name="Footer Placeholder 4">
             <a:extLst>
               <a:ext uri="{FF2B5EF4-FFF2-40B4-BE49-F238E27FC236}">
-                <a16:creationId xmlns="" xmlns:a16="http://schemas.microsoft.com/office/drawing/2014/main" id="{1BEDC99F-B076-45A0-FE10-65E5139A91AD}"/>
+                <a16:creationId xmlns:a16="http://schemas.microsoft.com/office/drawing/2014/main" id="{1BEDC99F-B076-45A0-FE10-65E5139A91AD}"/>
               </a:ext>
             </a:extLst>
           </p:cNvPr>
@@ -1181,7 +1180,7 @@
           <p:cNvPr id="6" name="Slide Number Placeholder 5">
             <a:extLst>
               <a:ext uri="{FF2B5EF4-FFF2-40B4-BE49-F238E27FC236}">
-                <a16:creationId xmlns="" xmlns:a16="http://schemas.microsoft.com/office/drawing/2014/main" id="{C5E8286A-837E-9320-3853-4FDA33C516AF}"/>
+                <a16:creationId xmlns:a16="http://schemas.microsoft.com/office/drawing/2014/main" id="{C5E8286A-837E-9320-3853-4FDA33C516AF}"/>
               </a:ext>
             </a:extLst>
           </p:cNvPr>
@@ -1240,7 +1239,7 @@
           <p:cNvPr id="2" name="Title 1">
             <a:extLst>
               <a:ext uri="{FF2B5EF4-FFF2-40B4-BE49-F238E27FC236}">
-                <a16:creationId xmlns="" xmlns:a16="http://schemas.microsoft.com/office/drawing/2014/main" id="{F5FDEF58-4013-C743-BBDD-D8A7269BE060}"/>
+                <a16:creationId xmlns:a16="http://schemas.microsoft.com/office/drawing/2014/main" id="{F5FDEF58-4013-C743-BBDD-D8A7269BE060}"/>
               </a:ext>
             </a:extLst>
           </p:cNvPr>
@@ -1268,7 +1267,7 @@
           <p:cNvPr id="3" name="Content Placeholder 2">
             <a:extLst>
               <a:ext uri="{FF2B5EF4-FFF2-40B4-BE49-F238E27FC236}">
-                <a16:creationId xmlns="" xmlns:a16="http://schemas.microsoft.com/office/drawing/2014/main" id="{8E54E216-EB96-6D51-3536-53372FCDA644}"/>
+                <a16:creationId xmlns:a16="http://schemas.microsoft.com/office/drawing/2014/main" id="{8E54E216-EB96-6D51-3536-53372FCDA644}"/>
               </a:ext>
             </a:extLst>
           </p:cNvPr>
@@ -1330,7 +1329,7 @@
           <p:cNvPr id="4" name="Content Placeholder 3">
             <a:extLst>
               <a:ext uri="{FF2B5EF4-FFF2-40B4-BE49-F238E27FC236}">
-                <a16:creationId xmlns="" xmlns:a16="http://schemas.microsoft.com/office/drawing/2014/main" id="{70C15DF0-3635-90B6-45BB-9712003FFED2}"/>
+                <a16:creationId xmlns:a16="http://schemas.microsoft.com/office/drawing/2014/main" id="{70C15DF0-3635-90B6-45BB-9712003FFED2}"/>
               </a:ext>
             </a:extLst>
           </p:cNvPr>
@@ -1392,7 +1391,7 @@
           <p:cNvPr id="5" name="Date Placeholder 4">
             <a:extLst>
               <a:ext uri="{FF2B5EF4-FFF2-40B4-BE49-F238E27FC236}">
-                <a16:creationId xmlns="" xmlns:a16="http://schemas.microsoft.com/office/drawing/2014/main" id="{628E69CC-AFCD-5DFF-F7E2-11C86D924481}"/>
+                <a16:creationId xmlns:a16="http://schemas.microsoft.com/office/drawing/2014/main" id="{628E69CC-AFCD-5DFF-F7E2-11C86D924481}"/>
               </a:ext>
             </a:extLst>
           </p:cNvPr>
@@ -1410,7 +1409,7 @@
           <a:p>
             <a:fld id="{D1C9F4E3-D04A-4E30-BA68-CF0B4003FE5F}" type="datetimeFigureOut">
               <a:rPr lang="en-US" smtClean="0"/>
-              <a:t>13-02-2024</a:t>
+              <a:t>12/7/2025</a:t>
             </a:fld>
             <a:endParaRPr lang="en-US"/>
           </a:p>
@@ -1421,7 +1420,7 @@
           <p:cNvPr id="6" name="Footer Placeholder 5">
             <a:extLst>
               <a:ext uri="{FF2B5EF4-FFF2-40B4-BE49-F238E27FC236}">
-                <a16:creationId xmlns="" xmlns:a16="http://schemas.microsoft.com/office/drawing/2014/main" id="{F4666F27-DD9B-5685-80E3-ABDC0675D086}"/>
+                <a16:creationId xmlns:a16="http://schemas.microsoft.com/office/drawing/2014/main" id="{F4666F27-DD9B-5685-80E3-ABDC0675D086}"/>
               </a:ext>
             </a:extLst>
           </p:cNvPr>
@@ -1446,7 +1445,7 @@
           <p:cNvPr id="7" name="Slide Number Placeholder 6">
             <a:extLst>
               <a:ext uri="{FF2B5EF4-FFF2-40B4-BE49-F238E27FC236}">
-                <a16:creationId xmlns="" xmlns:a16="http://schemas.microsoft.com/office/drawing/2014/main" id="{29A3378C-14AB-D652-34BA-1BA1B1D40857}"/>
+                <a16:creationId xmlns:a16="http://schemas.microsoft.com/office/drawing/2014/main" id="{29A3378C-14AB-D652-34BA-1BA1B1D40857}"/>
               </a:ext>
             </a:extLst>
           </p:cNvPr>
@@ -1505,7 +1504,7 @@
           <p:cNvPr id="2" name="Title 1">
             <a:extLst>
               <a:ext uri="{FF2B5EF4-FFF2-40B4-BE49-F238E27FC236}">
-                <a16:creationId xmlns="" xmlns:a16="http://schemas.microsoft.com/office/drawing/2014/main" id="{BF1C2AD2-21C9-098C-4758-23AE010E7D89}"/>
+                <a16:creationId xmlns:a16="http://schemas.microsoft.com/office/drawing/2014/main" id="{BF1C2AD2-21C9-098C-4758-23AE010E7D89}"/>
               </a:ext>
             </a:extLst>
           </p:cNvPr>
@@ -1538,7 +1537,7 @@
           <p:cNvPr id="3" name="Text Placeholder 2">
             <a:extLst>
               <a:ext uri="{FF2B5EF4-FFF2-40B4-BE49-F238E27FC236}">
-                <a16:creationId xmlns="" xmlns:a16="http://schemas.microsoft.com/office/drawing/2014/main" id="{B3F6290F-43C4-4A2D-94A8-BC27186A9168}"/>
+                <a16:creationId xmlns:a16="http://schemas.microsoft.com/office/drawing/2014/main" id="{B3F6290F-43C4-4A2D-94A8-BC27186A9168}"/>
               </a:ext>
             </a:extLst>
           </p:cNvPr>
@@ -1609,7 +1608,7 @@
           <p:cNvPr id="4" name="Content Placeholder 3">
             <a:extLst>
               <a:ext uri="{FF2B5EF4-FFF2-40B4-BE49-F238E27FC236}">
-                <a16:creationId xmlns="" xmlns:a16="http://schemas.microsoft.com/office/drawing/2014/main" id="{93557F4C-16B9-9366-81D6-7BD429FBB9C7}"/>
+                <a16:creationId xmlns:a16="http://schemas.microsoft.com/office/drawing/2014/main" id="{93557F4C-16B9-9366-81D6-7BD429FBB9C7}"/>
               </a:ext>
             </a:extLst>
           </p:cNvPr>
@@ -1671,7 +1670,7 @@
           <p:cNvPr id="5" name="Text Placeholder 4">
             <a:extLst>
               <a:ext uri="{FF2B5EF4-FFF2-40B4-BE49-F238E27FC236}">
-                <a16:creationId xmlns="" xmlns:a16="http://schemas.microsoft.com/office/drawing/2014/main" id="{7862A615-4394-857A-C979-E67B1826593E}"/>
+                <a16:creationId xmlns:a16="http://schemas.microsoft.com/office/drawing/2014/main" id="{7862A615-4394-857A-C979-E67B1826593E}"/>
               </a:ext>
             </a:extLst>
           </p:cNvPr>
@@ -1742,7 +1741,7 @@
           <p:cNvPr id="6" name="Content Placeholder 5">
             <a:extLst>
               <a:ext uri="{FF2B5EF4-FFF2-40B4-BE49-F238E27FC236}">
-                <a16:creationId xmlns="" xmlns:a16="http://schemas.microsoft.com/office/drawing/2014/main" id="{D3359880-D751-7DD6-E0FE-928B1103A23C}"/>
+                <a16:creationId xmlns:a16="http://schemas.microsoft.com/office/drawing/2014/main" id="{D3359880-D751-7DD6-E0FE-928B1103A23C}"/>
               </a:ext>
             </a:extLst>
           </p:cNvPr>
@@ -1804,7 +1803,7 @@
           <p:cNvPr id="7" name="Date Placeholder 6">
             <a:extLst>
               <a:ext uri="{FF2B5EF4-FFF2-40B4-BE49-F238E27FC236}">
-                <a16:creationId xmlns="" xmlns:a16="http://schemas.microsoft.com/office/drawing/2014/main" id="{AF97DD2E-FF1E-3C7F-975E-BA9A5B30B500}"/>
+                <a16:creationId xmlns:a16="http://schemas.microsoft.com/office/drawing/2014/main" id="{AF97DD2E-FF1E-3C7F-975E-BA9A5B30B500}"/>
               </a:ext>
             </a:extLst>
           </p:cNvPr>
@@ -1822,7 +1821,7 @@
           <a:p>
             <a:fld id="{D1C9F4E3-D04A-4E30-BA68-CF0B4003FE5F}" type="datetimeFigureOut">
               <a:rPr lang="en-US" smtClean="0"/>
-              <a:t>13-02-2024</a:t>
+              <a:t>12/7/2025</a:t>
             </a:fld>
             <a:endParaRPr lang="en-US"/>
           </a:p>
@@ -1833,7 +1832,7 @@
           <p:cNvPr id="8" name="Footer Placeholder 7">
             <a:extLst>
               <a:ext uri="{FF2B5EF4-FFF2-40B4-BE49-F238E27FC236}">
-                <a16:creationId xmlns="" xmlns:a16="http://schemas.microsoft.com/office/drawing/2014/main" id="{1B72D0FF-1AE7-C94A-EF7D-A827C80D70D4}"/>
+                <a16:creationId xmlns:a16="http://schemas.microsoft.com/office/drawing/2014/main" id="{1B72D0FF-1AE7-C94A-EF7D-A827C80D70D4}"/>
               </a:ext>
             </a:extLst>
           </p:cNvPr>
@@ -1858,7 +1857,7 @@
           <p:cNvPr id="9" name="Slide Number Placeholder 8">
             <a:extLst>
               <a:ext uri="{FF2B5EF4-FFF2-40B4-BE49-F238E27FC236}">
-                <a16:creationId xmlns="" xmlns:a16="http://schemas.microsoft.com/office/drawing/2014/main" id="{2FBE3FAC-C179-720F-B578-67164CAE7D54}"/>
+                <a16:creationId xmlns:a16="http://schemas.microsoft.com/office/drawing/2014/main" id="{2FBE3FAC-C179-720F-B578-67164CAE7D54}"/>
               </a:ext>
             </a:extLst>
           </p:cNvPr>
@@ -1917,7 +1916,7 @@
           <p:cNvPr id="2" name="Title 1">
             <a:extLst>
               <a:ext uri="{FF2B5EF4-FFF2-40B4-BE49-F238E27FC236}">
-                <a16:creationId xmlns="" xmlns:a16="http://schemas.microsoft.com/office/drawing/2014/main" id="{9574CFC4-EE70-B2AE-B7AE-9BE7D99DC5C2}"/>
+                <a16:creationId xmlns:a16="http://schemas.microsoft.com/office/drawing/2014/main" id="{9574CFC4-EE70-B2AE-B7AE-9BE7D99DC5C2}"/>
               </a:ext>
             </a:extLst>
           </p:cNvPr>
@@ -1945,7 +1944,7 @@
           <p:cNvPr id="3" name="Date Placeholder 2">
             <a:extLst>
               <a:ext uri="{FF2B5EF4-FFF2-40B4-BE49-F238E27FC236}">
-                <a16:creationId xmlns="" xmlns:a16="http://schemas.microsoft.com/office/drawing/2014/main" id="{786B0AD2-4F29-C414-80A1-187187ADCAEB}"/>
+                <a16:creationId xmlns:a16="http://schemas.microsoft.com/office/drawing/2014/main" id="{786B0AD2-4F29-C414-80A1-187187ADCAEB}"/>
               </a:ext>
             </a:extLst>
           </p:cNvPr>
@@ -1963,7 +1962,7 @@
           <a:p>
             <a:fld id="{D1C9F4E3-D04A-4E30-BA68-CF0B4003FE5F}" type="datetimeFigureOut">
               <a:rPr lang="en-US" smtClean="0"/>
-              <a:t>13-02-2024</a:t>
+              <a:t>12/7/2025</a:t>
             </a:fld>
             <a:endParaRPr lang="en-US"/>
           </a:p>
@@ -1974,7 +1973,7 @@
           <p:cNvPr id="4" name="Footer Placeholder 3">
             <a:extLst>
               <a:ext uri="{FF2B5EF4-FFF2-40B4-BE49-F238E27FC236}">
-                <a16:creationId xmlns="" xmlns:a16="http://schemas.microsoft.com/office/drawing/2014/main" id="{C14DA5F6-CDD6-5547-E21F-8445814F7793}"/>
+                <a16:creationId xmlns:a16="http://schemas.microsoft.com/office/drawing/2014/main" id="{C14DA5F6-CDD6-5547-E21F-8445814F7793}"/>
               </a:ext>
             </a:extLst>
           </p:cNvPr>
@@ -1999,7 +1998,7 @@
           <p:cNvPr id="5" name="Slide Number Placeholder 4">
             <a:extLst>
               <a:ext uri="{FF2B5EF4-FFF2-40B4-BE49-F238E27FC236}">
-                <a16:creationId xmlns="" xmlns:a16="http://schemas.microsoft.com/office/drawing/2014/main" id="{00CF106B-1165-4DCC-F931-371EF85375DB}"/>
+                <a16:creationId xmlns:a16="http://schemas.microsoft.com/office/drawing/2014/main" id="{00CF106B-1165-4DCC-F931-371EF85375DB}"/>
               </a:ext>
             </a:extLst>
           </p:cNvPr>
@@ -2058,7 +2057,7 @@
           <p:cNvPr id="2" name="Date Placeholder 1">
             <a:extLst>
               <a:ext uri="{FF2B5EF4-FFF2-40B4-BE49-F238E27FC236}">
-                <a16:creationId xmlns="" xmlns:a16="http://schemas.microsoft.com/office/drawing/2014/main" id="{59138ABD-4E1E-E7B8-1539-468277995A48}"/>
+                <a16:creationId xmlns:a16="http://schemas.microsoft.com/office/drawing/2014/main" id="{59138ABD-4E1E-E7B8-1539-468277995A48}"/>
               </a:ext>
             </a:extLst>
           </p:cNvPr>
@@ -2076,7 +2075,7 @@
           <a:p>
             <a:fld id="{D1C9F4E3-D04A-4E30-BA68-CF0B4003FE5F}" type="datetimeFigureOut">
               <a:rPr lang="en-US" smtClean="0"/>
-              <a:t>13-02-2024</a:t>
+              <a:t>12/7/2025</a:t>
             </a:fld>
             <a:endParaRPr lang="en-US"/>
           </a:p>
@@ -2087,7 +2086,7 @@
           <p:cNvPr id="3" name="Footer Placeholder 2">
             <a:extLst>
               <a:ext uri="{FF2B5EF4-FFF2-40B4-BE49-F238E27FC236}">
-                <a16:creationId xmlns="" xmlns:a16="http://schemas.microsoft.com/office/drawing/2014/main" id="{7C99512B-A6B4-B9B5-E290-AD2D5C1AB593}"/>
+                <a16:creationId xmlns:a16="http://schemas.microsoft.com/office/drawing/2014/main" id="{7C99512B-A6B4-B9B5-E290-AD2D5C1AB593}"/>
               </a:ext>
             </a:extLst>
           </p:cNvPr>
@@ -2112,7 +2111,7 @@
           <p:cNvPr id="4" name="Slide Number Placeholder 3">
             <a:extLst>
               <a:ext uri="{FF2B5EF4-FFF2-40B4-BE49-F238E27FC236}">
-                <a16:creationId xmlns="" xmlns:a16="http://schemas.microsoft.com/office/drawing/2014/main" id="{BF1A5FCB-ED0D-7BF8-3B65-3868D5089B4D}"/>
+                <a16:creationId xmlns:a16="http://schemas.microsoft.com/office/drawing/2014/main" id="{BF1A5FCB-ED0D-7BF8-3B65-3868D5089B4D}"/>
               </a:ext>
             </a:extLst>
           </p:cNvPr>
@@ -2171,7 +2170,7 @@
           <p:cNvPr id="2" name="Title 1">
             <a:extLst>
               <a:ext uri="{FF2B5EF4-FFF2-40B4-BE49-F238E27FC236}">
-                <a16:creationId xmlns="" xmlns:a16="http://schemas.microsoft.com/office/drawing/2014/main" id="{18CBB628-A4EA-F441-C832-299977C025BD}"/>
+                <a16:creationId xmlns:a16="http://schemas.microsoft.com/office/drawing/2014/main" id="{18CBB628-A4EA-F441-C832-299977C025BD}"/>
               </a:ext>
             </a:extLst>
           </p:cNvPr>
@@ -2208,7 +2207,7 @@
           <p:cNvPr id="3" name="Content Placeholder 2">
             <a:extLst>
               <a:ext uri="{FF2B5EF4-FFF2-40B4-BE49-F238E27FC236}">
-                <a16:creationId xmlns="" xmlns:a16="http://schemas.microsoft.com/office/drawing/2014/main" id="{F742DAAA-D223-BA8E-3E3A-2458744DEC32}"/>
+                <a16:creationId xmlns:a16="http://schemas.microsoft.com/office/drawing/2014/main" id="{F742DAAA-D223-BA8E-3E3A-2458744DEC32}"/>
               </a:ext>
             </a:extLst>
           </p:cNvPr>
@@ -2298,7 +2297,7 @@
           <p:cNvPr id="4" name="Text Placeholder 3">
             <a:extLst>
               <a:ext uri="{FF2B5EF4-FFF2-40B4-BE49-F238E27FC236}">
-                <a16:creationId xmlns="" xmlns:a16="http://schemas.microsoft.com/office/drawing/2014/main" id="{8D057460-3015-9BD0-E06C-6DC81D928EAC}"/>
+                <a16:creationId xmlns:a16="http://schemas.microsoft.com/office/drawing/2014/main" id="{8D057460-3015-9BD0-E06C-6DC81D928EAC}"/>
               </a:ext>
             </a:extLst>
           </p:cNvPr>
@@ -2369,7 +2368,7 @@
           <p:cNvPr id="5" name="Date Placeholder 4">
             <a:extLst>
               <a:ext uri="{FF2B5EF4-FFF2-40B4-BE49-F238E27FC236}">
-                <a16:creationId xmlns="" xmlns:a16="http://schemas.microsoft.com/office/drawing/2014/main" id="{8CF8BA37-D7F0-A144-CCAD-3136C71EA8AD}"/>
+                <a16:creationId xmlns:a16="http://schemas.microsoft.com/office/drawing/2014/main" id="{8CF8BA37-D7F0-A144-CCAD-3136C71EA8AD}"/>
               </a:ext>
             </a:extLst>
           </p:cNvPr>
@@ -2387,7 +2386,7 @@
           <a:p>
             <a:fld id="{D1C9F4E3-D04A-4E30-BA68-CF0B4003FE5F}" type="datetimeFigureOut">
               <a:rPr lang="en-US" smtClean="0"/>
-              <a:t>13-02-2024</a:t>
+              <a:t>12/7/2025</a:t>
             </a:fld>
             <a:endParaRPr lang="en-US"/>
           </a:p>
@@ -2398,7 +2397,7 @@
           <p:cNvPr id="6" name="Footer Placeholder 5">
             <a:extLst>
               <a:ext uri="{FF2B5EF4-FFF2-40B4-BE49-F238E27FC236}">
-                <a16:creationId xmlns="" xmlns:a16="http://schemas.microsoft.com/office/drawing/2014/main" id="{CD65038B-AD31-0E4C-D8A6-3F68FD77DA13}"/>
+                <a16:creationId xmlns:a16="http://schemas.microsoft.com/office/drawing/2014/main" id="{CD65038B-AD31-0E4C-D8A6-3F68FD77DA13}"/>
               </a:ext>
             </a:extLst>
           </p:cNvPr>
@@ -2423,7 +2422,7 @@
           <p:cNvPr id="7" name="Slide Number Placeholder 6">
             <a:extLst>
               <a:ext uri="{FF2B5EF4-FFF2-40B4-BE49-F238E27FC236}">
-                <a16:creationId xmlns="" xmlns:a16="http://schemas.microsoft.com/office/drawing/2014/main" id="{06945023-9627-B4DF-2759-6B84B6D97BFF}"/>
+                <a16:creationId xmlns:a16="http://schemas.microsoft.com/office/drawing/2014/main" id="{06945023-9627-B4DF-2759-6B84B6D97BFF}"/>
               </a:ext>
             </a:extLst>
           </p:cNvPr>
@@ -2482,7 +2481,7 @@
           <p:cNvPr id="2" name="Title 1">
             <a:extLst>
               <a:ext uri="{FF2B5EF4-FFF2-40B4-BE49-F238E27FC236}">
-                <a16:creationId xmlns="" xmlns:a16="http://schemas.microsoft.com/office/drawing/2014/main" id="{841A979F-E83E-C079-6A0F-FC9AB360A06E}"/>
+                <a16:creationId xmlns:a16="http://schemas.microsoft.com/office/drawing/2014/main" id="{841A979F-E83E-C079-6A0F-FC9AB360A06E}"/>
               </a:ext>
             </a:extLst>
           </p:cNvPr>
@@ -2519,7 +2518,7 @@
           <p:cNvPr id="3" name="Picture Placeholder 2">
             <a:extLst>
               <a:ext uri="{FF2B5EF4-FFF2-40B4-BE49-F238E27FC236}">
-                <a16:creationId xmlns="" xmlns:a16="http://schemas.microsoft.com/office/drawing/2014/main" id="{011C9720-B8C8-1209-5B77-579C030A6B06}"/>
+                <a16:creationId xmlns:a16="http://schemas.microsoft.com/office/drawing/2014/main" id="{011C9720-B8C8-1209-5B77-579C030A6B06}"/>
               </a:ext>
             </a:extLst>
           </p:cNvPr>
@@ -2586,7 +2585,7 @@
           <p:cNvPr id="4" name="Text Placeholder 3">
             <a:extLst>
               <a:ext uri="{FF2B5EF4-FFF2-40B4-BE49-F238E27FC236}">
-                <a16:creationId xmlns="" xmlns:a16="http://schemas.microsoft.com/office/drawing/2014/main" id="{312A0B7E-CDBD-42AE-547C-9254FEE023BE}"/>
+                <a16:creationId xmlns:a16="http://schemas.microsoft.com/office/drawing/2014/main" id="{312A0B7E-CDBD-42AE-547C-9254FEE023BE}"/>
               </a:ext>
             </a:extLst>
           </p:cNvPr>
@@ -2657,7 +2656,7 @@
           <p:cNvPr id="5" name="Date Placeholder 4">
             <a:extLst>
               <a:ext uri="{FF2B5EF4-FFF2-40B4-BE49-F238E27FC236}">
-                <a16:creationId xmlns="" xmlns:a16="http://schemas.microsoft.com/office/drawing/2014/main" id="{3C45666A-8B02-88F7-7752-06329D712189}"/>
+                <a16:creationId xmlns:a16="http://schemas.microsoft.com/office/drawing/2014/main" id="{3C45666A-8B02-88F7-7752-06329D712189}"/>
               </a:ext>
             </a:extLst>
           </p:cNvPr>
@@ -2675,7 +2674,7 @@
           <a:p>
             <a:fld id="{D1C9F4E3-D04A-4E30-BA68-CF0B4003FE5F}" type="datetimeFigureOut">
               <a:rPr lang="en-US" smtClean="0"/>
-              <a:t>13-02-2024</a:t>
+              <a:t>12/7/2025</a:t>
             </a:fld>
             <a:endParaRPr lang="en-US"/>
           </a:p>
@@ -2686,7 +2685,7 @@
           <p:cNvPr id="6" name="Footer Placeholder 5">
             <a:extLst>
               <a:ext uri="{FF2B5EF4-FFF2-40B4-BE49-F238E27FC236}">
-                <a16:creationId xmlns="" xmlns:a16="http://schemas.microsoft.com/office/drawing/2014/main" id="{A88D5F6C-1167-E521-E4F9-8AEA9990B49E}"/>
+                <a16:creationId xmlns:a16="http://schemas.microsoft.com/office/drawing/2014/main" id="{A88D5F6C-1167-E521-E4F9-8AEA9990B49E}"/>
               </a:ext>
             </a:extLst>
           </p:cNvPr>
@@ -2711,7 +2710,7 @@
           <p:cNvPr id="7" name="Slide Number Placeholder 6">
             <a:extLst>
               <a:ext uri="{FF2B5EF4-FFF2-40B4-BE49-F238E27FC236}">
-                <a16:creationId xmlns="" xmlns:a16="http://schemas.microsoft.com/office/drawing/2014/main" id="{74321297-D06E-1D77-EAD5-8A07D11FCDC7}"/>
+                <a16:creationId xmlns:a16="http://schemas.microsoft.com/office/drawing/2014/main" id="{74321297-D06E-1D77-EAD5-8A07D11FCDC7}"/>
               </a:ext>
             </a:extLst>
           </p:cNvPr>
@@ -2784,7 +2783,7 @@
           <p:cNvPr id="2" name="Title Placeholder 1">
             <a:extLst>
               <a:ext uri="{FF2B5EF4-FFF2-40B4-BE49-F238E27FC236}">
-                <a16:creationId xmlns="" xmlns:a16="http://schemas.microsoft.com/office/drawing/2014/main" id="{8A8F5B09-66A2-A783-53EB-48859B8D596F}"/>
+                <a16:creationId xmlns:a16="http://schemas.microsoft.com/office/drawing/2014/main" id="{8A8F5B09-66A2-A783-53EB-48859B8D596F}"/>
               </a:ext>
             </a:extLst>
           </p:cNvPr>
@@ -2822,7 +2821,7 @@
           <p:cNvPr id="3" name="Text Placeholder 2">
             <a:extLst>
               <a:ext uri="{FF2B5EF4-FFF2-40B4-BE49-F238E27FC236}">
-                <a16:creationId xmlns="" xmlns:a16="http://schemas.microsoft.com/office/drawing/2014/main" id="{1039E452-708C-2340-4342-81F9D438F40E}"/>
+                <a16:creationId xmlns:a16="http://schemas.microsoft.com/office/drawing/2014/main" id="{1039E452-708C-2340-4342-81F9D438F40E}"/>
               </a:ext>
             </a:extLst>
           </p:cNvPr>
@@ -2889,7 +2888,7 @@
           <p:cNvPr id="4" name="Date Placeholder 3">
             <a:extLst>
               <a:ext uri="{FF2B5EF4-FFF2-40B4-BE49-F238E27FC236}">
-                <a16:creationId xmlns="" xmlns:a16="http://schemas.microsoft.com/office/drawing/2014/main" id="{0FC9952B-4E2E-FE1B-9D97-14D74EE5784E}"/>
+                <a16:creationId xmlns:a16="http://schemas.microsoft.com/office/drawing/2014/main" id="{0FC9952B-4E2E-FE1B-9D97-14D74EE5784E}"/>
               </a:ext>
             </a:extLst>
           </p:cNvPr>
@@ -2925,7 +2924,7 @@
           <a:p>
             <a:fld id="{D1C9F4E3-D04A-4E30-BA68-CF0B4003FE5F}" type="datetimeFigureOut">
               <a:rPr lang="en-US" smtClean="0"/>
-              <a:t>13-02-2024</a:t>
+              <a:t>12/7/2025</a:t>
             </a:fld>
             <a:endParaRPr lang="en-US"/>
           </a:p>
@@ -2936,7 +2935,7 @@
           <p:cNvPr id="5" name="Footer Placeholder 4">
             <a:extLst>
               <a:ext uri="{FF2B5EF4-FFF2-40B4-BE49-F238E27FC236}">
-                <a16:creationId xmlns="" xmlns:a16="http://schemas.microsoft.com/office/drawing/2014/main" id="{693D502C-4E92-ECF4-FD64-5D99A836E5DE}"/>
+                <a16:creationId xmlns:a16="http://schemas.microsoft.com/office/drawing/2014/main" id="{693D502C-4E92-ECF4-FD64-5D99A836E5DE}"/>
               </a:ext>
             </a:extLst>
           </p:cNvPr>
@@ -2979,7 +2978,7 @@
           <p:cNvPr id="6" name="Slide Number Placeholder 5">
             <a:extLst>
               <a:ext uri="{FF2B5EF4-FFF2-40B4-BE49-F238E27FC236}">
-                <a16:creationId xmlns="" xmlns:a16="http://schemas.microsoft.com/office/drawing/2014/main" id="{904493F6-6CBA-D793-E2CA-AD6F3B18BBE4}"/>
+                <a16:creationId xmlns:a16="http://schemas.microsoft.com/office/drawing/2014/main" id="{904493F6-6CBA-D793-E2CA-AD6F3B18BBE4}"/>
               </a:ext>
             </a:extLst>
           </p:cNvPr>
@@ -3361,7 +3360,7 @@
           <p:cNvPr id="2" name="Title 1">
             <a:extLst>
               <a:ext uri="{FF2B5EF4-FFF2-40B4-BE49-F238E27FC236}">
-                <a16:creationId xmlns="" xmlns:a16="http://schemas.microsoft.com/office/drawing/2014/main" id="{CFE76458-E91D-DA7F-A91D-01EDA63A66BE}"/>
+                <a16:creationId xmlns:a16="http://schemas.microsoft.com/office/drawing/2014/main" id="{CFE76458-E91D-DA7F-A91D-01EDA63A66BE}"/>
               </a:ext>
             </a:extLst>
           </p:cNvPr>
@@ -3400,7 +3399,7 @@
           <a:lstStyle/>
           <a:p>
             <a:r>
-              <a:rPr lang="en-US" smtClean="0"/>
+              <a:rPr lang="en-US"/>
               <a:t>Blue Yonder Airlines</a:t>
             </a:r>
             <a:endParaRPr lang="en-US" dirty="0"/>
@@ -3412,7 +3411,7 @@
           <p:cNvPr id="3" name="Subtitle 2">
             <a:extLst>
               <a:ext uri="{FF2B5EF4-FFF2-40B4-BE49-F238E27FC236}">
-                <a16:creationId xmlns="" xmlns:a16="http://schemas.microsoft.com/office/drawing/2014/main" id="{659944D3-6408-05B8-90E0-728C75477334}"/>
+                <a16:creationId xmlns:a16="http://schemas.microsoft.com/office/drawing/2014/main" id="{659944D3-6408-05B8-90E0-728C75477334}"/>
               </a:ext>
             </a:extLst>
           </p:cNvPr>
@@ -3451,7 +3450,7 @@
           <a:lstStyle/>
           <a:p>
             <a:r>
-              <a:rPr lang="en-US" smtClean="0"/>
+              <a:rPr lang="en-US"/>
               <a:t>Fabulous sights await you</a:t>
             </a:r>
             <a:endParaRPr lang="en-US" dirty="0"/>
@@ -3493,7 +3492,7 @@
           <p:cNvPr id="2" name="Title 1">
             <a:extLst>
               <a:ext uri="{FF2B5EF4-FFF2-40B4-BE49-F238E27FC236}">
-                <a16:creationId xmlns="" xmlns:a16="http://schemas.microsoft.com/office/drawing/2014/main" id="{03285875-D5D7-848D-7492-DD69C03DA8B2}"/>
+                <a16:creationId xmlns:a16="http://schemas.microsoft.com/office/drawing/2014/main" id="{7ECD19FD-AE8C-447E-F53C-8F943B369839}"/>
               </a:ext>
             </a:extLst>
           </p:cNvPr>
@@ -3510,7 +3509,7 @@
           <a:lstStyle/>
           <a:p>
             <a:r>
-              <a:rPr lang="en-US" dirty="0"/>
+              <a:rPr lang="en-US" u="sng" dirty="0"/>
               <a:t>Frequent Flyer Points</a:t>
             </a:r>
           </a:p>
@@ -3521,1002 +3520,7 @@
           <p:cNvPr id="4" name="Table 5">
             <a:extLst>
               <a:ext uri="{FF2B5EF4-FFF2-40B4-BE49-F238E27FC236}">
-                <a16:creationId xmlns="" xmlns:a16="http://schemas.microsoft.com/office/drawing/2014/main" id="{EF71356E-E1F0-FBC9-AA95-F33CCE4FB391}"/>
-              </a:ext>
-            </a:extLst>
-          </p:cNvPr>
-          <p:cNvGraphicFramePr>
-            <a:graphicFrameLocks noGrp="1"/>
-          </p:cNvGraphicFramePr>
-          <p:nvPr>
-            <p:extLst>
-              <p:ext uri="{D42A27DB-BD31-4B8C-83A1-F6EECF244321}">
-                <p14:modId xmlns:p14="http://schemas.microsoft.com/office/powerpoint/2010/main" val="626553726"/>
-              </p:ext>
-            </p:extLst>
-          </p:nvPr>
-        </p:nvGraphicFramePr>
-        <p:xfrm>
-          <a:off x="2144889" y="1735930"/>
-          <a:ext cx="7861123" cy="4134290"/>
-        </p:xfrm>
-        <a:graphic>
-          <a:graphicData uri="http://schemas.openxmlformats.org/drawingml/2006/table">
-            <a:tbl>
-              <a:tblPr firstRow="1" bandRow="1">
-                <a:tableStyleId>{073A0DAA-6AF3-43AB-8588-CEC1D06C72B9}</a:tableStyleId>
-              </a:tblPr>
-              <a:tblGrid>
-                <a:gridCol w="2442457">
-                  <a:extLst>
-                    <a:ext uri="{9D8B030D-6E8A-4147-A177-3AD203B41FA5}">
-                      <a16:colId xmlns="" xmlns:a16="http://schemas.microsoft.com/office/drawing/2014/main" val="1557611189"/>
-                    </a:ext>
-                  </a:extLst>
-                </a:gridCol>
-                <a:gridCol w="2709333">
-                  <a:extLst>
-                    <a:ext uri="{9D8B030D-6E8A-4147-A177-3AD203B41FA5}">
-                      <a16:colId xmlns="" xmlns:a16="http://schemas.microsoft.com/office/drawing/2014/main" val="2860289916"/>
-                    </a:ext>
-                  </a:extLst>
-                </a:gridCol>
-                <a:gridCol w="2709333">
-                  <a:extLst>
-                    <a:ext uri="{9D8B030D-6E8A-4147-A177-3AD203B41FA5}">
-                      <a16:colId xmlns="" xmlns:a16="http://schemas.microsoft.com/office/drawing/2014/main" val="1876057256"/>
-                    </a:ext>
-                  </a:extLst>
-                </a:gridCol>
-              </a:tblGrid>
-              <a:tr h="826858">
-                <a:tc>
-                  <a:txBody>
-                    <a:bodyPr/>
-                    <a:lstStyle/>
-                    <a:p>
-                      <a:r>
-                        <a:rPr lang="en-US" dirty="0"/>
-                        <a:t>Years in Program </a:t>
-                      </a:r>
-                    </a:p>
-                  </a:txBody>
-                  <a:tcPr/>
-                </a:tc>
-                <a:tc>
-                  <a:txBody>
-                    <a:bodyPr/>
-                    <a:lstStyle/>
-                    <a:p>
-                      <a:r>
-                        <a:rPr lang="en-US" dirty="0"/>
-                        <a:t>Average Distance Traveled</a:t>
-                      </a:r>
-                    </a:p>
-                  </a:txBody>
-                  <a:tcPr/>
-                </a:tc>
-                <a:tc>
-                  <a:txBody>
-                    <a:bodyPr/>
-                    <a:lstStyle/>
-                    <a:p>
-                      <a:r>
-                        <a:rPr lang="en-US" dirty="0"/>
-                        <a:t>Average Points Earned </a:t>
-                      </a:r>
-                    </a:p>
-                  </a:txBody>
-                  <a:tcPr/>
-                </a:tc>
-                <a:extLst>
-                  <a:ext uri="{0D108BD9-81ED-4DB2-BD59-A6C34878D82A}">
-                    <a16:rowId xmlns="" xmlns:a16="http://schemas.microsoft.com/office/drawing/2014/main" val="3670756924"/>
-                  </a:ext>
-                </a:extLst>
-              </a:tr>
-              <a:tr h="826858">
-                <a:tc>
-                  <a:txBody>
-                    <a:bodyPr/>
-                    <a:lstStyle/>
-                    <a:p>
-                      <a:pPr algn="ctr"/>
-                      <a:r>
-                        <a:rPr lang="en-US" dirty="0"/>
-                        <a:t>Year 1</a:t>
-                      </a:r>
-                    </a:p>
-                  </a:txBody>
-                  <a:tcPr/>
-                </a:tc>
-                <a:tc>
-                  <a:txBody>
-                    <a:bodyPr/>
-                    <a:lstStyle/>
-                    <a:p>
-                      <a:pPr algn="ctr"/>
-                      <a:r>
-                        <a:rPr lang="en-US" dirty="0"/>
-                        <a:t>4,000</a:t>
-                      </a:r>
-                    </a:p>
-                  </a:txBody>
-                  <a:tcPr/>
-                </a:tc>
-                <a:tc>
-                  <a:txBody>
-                    <a:bodyPr/>
-                    <a:lstStyle/>
-                    <a:p>
-                      <a:pPr algn="ctr"/>
-                      <a:r>
-                        <a:rPr lang="en-US" dirty="0"/>
-                        <a:t>400</a:t>
-                      </a:r>
-                    </a:p>
-                  </a:txBody>
-                  <a:tcPr/>
-                </a:tc>
-                <a:extLst>
-                  <a:ext uri="{0D108BD9-81ED-4DB2-BD59-A6C34878D82A}">
-                    <a16:rowId xmlns="" xmlns:a16="http://schemas.microsoft.com/office/drawing/2014/main" val="960111386"/>
-                  </a:ext>
-                </a:extLst>
-              </a:tr>
-              <a:tr h="826858">
-                <a:tc>
-                  <a:txBody>
-                    <a:bodyPr/>
-                    <a:lstStyle/>
-                    <a:p>
-                      <a:pPr algn="ctr"/>
-                      <a:r>
-                        <a:rPr lang="en-US" dirty="0"/>
-                        <a:t>Year 5</a:t>
-                      </a:r>
-                    </a:p>
-                  </a:txBody>
-                  <a:tcPr/>
-                </a:tc>
-                <a:tc>
-                  <a:txBody>
-                    <a:bodyPr/>
-                    <a:lstStyle/>
-                    <a:p>
-                      <a:pPr algn="ctr"/>
-                      <a:r>
-                        <a:rPr lang="en-US" dirty="0"/>
-                        <a:t>6,500</a:t>
-                      </a:r>
-                    </a:p>
-                  </a:txBody>
-                  <a:tcPr/>
-                </a:tc>
-                <a:tc>
-                  <a:txBody>
-                    <a:bodyPr/>
-                    <a:lstStyle/>
-                    <a:p>
-                      <a:pPr algn="ctr"/>
-                      <a:r>
-                        <a:rPr lang="en-US" dirty="0"/>
-                        <a:t>975</a:t>
-                      </a:r>
-                    </a:p>
-                  </a:txBody>
-                  <a:tcPr/>
-                </a:tc>
-                <a:extLst>
-                  <a:ext uri="{0D108BD9-81ED-4DB2-BD59-A6C34878D82A}">
-                    <a16:rowId xmlns="" xmlns:a16="http://schemas.microsoft.com/office/drawing/2014/main" val="1773432423"/>
-                  </a:ext>
-                </a:extLst>
-              </a:tr>
-              <a:tr h="826858">
-                <a:tc>
-                  <a:txBody>
-                    <a:bodyPr/>
-                    <a:lstStyle/>
-                    <a:p>
-                      <a:pPr algn="ctr"/>
-                      <a:r>
-                        <a:rPr lang="en-US" dirty="0"/>
-                        <a:t>Year 10</a:t>
-                      </a:r>
-                    </a:p>
-                  </a:txBody>
-                  <a:tcPr/>
-                </a:tc>
-                <a:tc>
-                  <a:txBody>
-                    <a:bodyPr/>
-                    <a:lstStyle/>
-                    <a:p>
-                      <a:pPr algn="ctr"/>
-                      <a:r>
-                        <a:rPr lang="en-US" dirty="0"/>
-                        <a:t>8,000</a:t>
-                      </a:r>
-                    </a:p>
-                  </a:txBody>
-                  <a:tcPr/>
-                </a:tc>
-                <a:tc>
-                  <a:txBody>
-                    <a:bodyPr/>
-                    <a:lstStyle/>
-                    <a:p>
-                      <a:pPr algn="ctr"/>
-                      <a:r>
-                        <a:rPr lang="en-US" dirty="0"/>
-                        <a:t>1600</a:t>
-                      </a:r>
-                    </a:p>
-                  </a:txBody>
-                  <a:tcPr/>
-                </a:tc>
-                <a:extLst>
-                  <a:ext uri="{0D108BD9-81ED-4DB2-BD59-A6C34878D82A}">
-                    <a16:rowId xmlns="" xmlns:a16="http://schemas.microsoft.com/office/drawing/2014/main" val="2901156091"/>
-                  </a:ext>
-                </a:extLst>
-              </a:tr>
-              <a:tr h="826858">
-                <a:tc>
-                  <a:txBody>
-                    <a:bodyPr/>
-                    <a:lstStyle/>
-                    <a:p>
-                      <a:pPr algn="ctr"/>
-                      <a:r>
-                        <a:rPr lang="en-US" dirty="0"/>
-                        <a:t>Year 20</a:t>
-                      </a:r>
-                    </a:p>
-                  </a:txBody>
-                  <a:tcPr/>
-                </a:tc>
-                <a:tc>
-                  <a:txBody>
-                    <a:bodyPr/>
-                    <a:lstStyle/>
-                    <a:p>
-                      <a:pPr algn="ctr"/>
-                      <a:r>
-                        <a:rPr lang="en-US" dirty="0"/>
-                        <a:t>10,000</a:t>
-                      </a:r>
-                    </a:p>
-                  </a:txBody>
-                  <a:tcPr/>
-                </a:tc>
-                <a:tc>
-                  <a:txBody>
-                    <a:bodyPr/>
-                    <a:lstStyle/>
-                    <a:p>
-                      <a:pPr algn="ctr"/>
-                      <a:r>
-                        <a:rPr lang="en-US" dirty="0"/>
-                        <a:t>2,500</a:t>
-                      </a:r>
-                    </a:p>
-                  </a:txBody>
-                  <a:tcPr/>
-                </a:tc>
-                <a:extLst>
-                  <a:ext uri="{0D108BD9-81ED-4DB2-BD59-A6C34878D82A}">
-                    <a16:rowId xmlns="" xmlns:a16="http://schemas.microsoft.com/office/drawing/2014/main" val="691706715"/>
-                  </a:ext>
-                </a:extLst>
-              </a:tr>
-            </a:tbl>
-          </a:graphicData>
-        </a:graphic>
-      </p:graphicFrame>
-    </p:spTree>
-    <p:extLst>
-      <p:ext uri="{BB962C8B-B14F-4D97-AF65-F5344CB8AC3E}">
-        <p14:creationId xmlns:p14="http://schemas.microsoft.com/office/powerpoint/2010/main" val="3547537834"/>
-      </p:ext>
-    </p:extLst>
-  </p:cSld>
-  <p:clrMapOvr>
-    <a:masterClrMapping/>
-  </p:clrMapOvr>
-</p:sld>
-</file>
-
-<file path=ppt/slides/slide3.xml><?xml version="1.0" encoding="utf-8"?>
-<p:sld xmlns:a="http://schemas.openxmlformats.org/drawingml/2006/main" xmlns:r="http://schemas.openxmlformats.org/officeDocument/2006/relationships" xmlns:p="http://schemas.openxmlformats.org/presentationml/2006/main">
-  <p:cSld>
-    <p:spTree>
-      <p:nvGrpSpPr>
-        <p:cNvPr id="1" name=""/>
-        <p:cNvGrpSpPr/>
-        <p:nvPr/>
-      </p:nvGrpSpPr>
-      <p:grpSpPr>
-        <a:xfrm>
-          <a:off x="0" y="0"/>
-          <a:ext cx="0" cy="0"/>
-          <a:chOff x="0" y="0"/>
-          <a:chExt cx="0" cy="0"/>
-        </a:xfrm>
-      </p:grpSpPr>
-      <p:sp>
-        <p:nvSpPr>
-          <p:cNvPr id="2" name="Title 1">
-            <a:extLst>
-              <a:ext uri="{FF2B5EF4-FFF2-40B4-BE49-F238E27FC236}">
-                <a16:creationId xmlns="" xmlns:a16="http://schemas.microsoft.com/office/drawing/2014/main" id="{28685D3B-A586-0516-2BFF-043CBACD305F}"/>
-              </a:ext>
-            </a:extLst>
-          </p:cNvPr>
-          <p:cNvSpPr>
-            <a:spLocks noGrp="1"/>
-          </p:cNvSpPr>
-          <p:nvPr>
-            <p:ph type="title"/>
-          </p:nvPr>
-        </p:nvSpPr>
-        <p:spPr/>
-        <p:txBody>
-          <a:bodyPr/>
-          <a:lstStyle/>
-          <a:p>
-            <a:endParaRPr lang="en-US"/>
-          </a:p>
-        </p:txBody>
-      </p:sp>
-      <p:sp>
-        <p:nvSpPr>
-          <p:cNvPr id="3" name="Content Placeholder 2">
-            <a:extLst>
-              <a:ext uri="{FF2B5EF4-FFF2-40B4-BE49-F238E27FC236}">
-                <a16:creationId xmlns="" xmlns:a16="http://schemas.microsoft.com/office/drawing/2014/main" id="{3B69B050-ACA0-5E9B-5408-F4CF1E478496}"/>
-              </a:ext>
-            </a:extLst>
-          </p:cNvPr>
-          <p:cNvSpPr>
-            <a:spLocks noGrp="1"/>
-          </p:cNvSpPr>
-          <p:nvPr>
-            <p:ph idx="1"/>
-          </p:nvPr>
-        </p:nvSpPr>
-        <p:spPr/>
-        <p:txBody>
-          <a:bodyPr/>
-          <a:lstStyle/>
-          <a:p>
-            <a:endParaRPr lang="en-US"/>
-          </a:p>
-        </p:txBody>
-      </p:sp>
-    </p:spTree>
-    <p:extLst>
-      <p:ext uri="{BB962C8B-B14F-4D97-AF65-F5344CB8AC3E}">
-        <p14:creationId xmlns:p14="http://schemas.microsoft.com/office/powerpoint/2010/main" val="631966446"/>
-      </p:ext>
-    </p:extLst>
-  </p:cSld>
-  <p:clrMapOvr>
-    <a:masterClrMapping/>
-  </p:clrMapOvr>
-</p:sld>
-</file>
-
-<file path=ppt/slides/slide4.xml><?xml version="1.0" encoding="utf-8"?>
-<p:sld xmlns:a="http://schemas.openxmlformats.org/drawingml/2006/main" xmlns:r="http://schemas.openxmlformats.org/officeDocument/2006/relationships" xmlns:p="http://schemas.openxmlformats.org/presentationml/2006/main">
-  <p:cSld>
-    <p:spTree>
-      <p:nvGrpSpPr>
-        <p:cNvPr id="1" name=""/>
-        <p:cNvGrpSpPr/>
-        <p:nvPr/>
-      </p:nvGrpSpPr>
-      <p:grpSpPr>
-        <a:xfrm>
-          <a:off x="0" y="0"/>
-          <a:ext cx="0" cy="0"/>
-          <a:chOff x="0" y="0"/>
-          <a:chExt cx="0" cy="0"/>
-        </a:xfrm>
-      </p:grpSpPr>
-      <p:sp>
-        <p:nvSpPr>
-          <p:cNvPr id="2" name="Title 1"/>
-          <p:cNvSpPr>
-            <a:spLocks noGrp="1"/>
-          </p:cNvSpPr>
-          <p:nvPr>
-            <p:ph type="title"/>
-          </p:nvPr>
-        </p:nvSpPr>
-        <p:spPr/>
-        <p:txBody>
-          <a:bodyPr/>
-          <a:lstStyle/>
-          <a:p>
-            <a:endParaRPr lang="vi-VN"/>
-          </a:p>
-        </p:txBody>
-      </p:sp>
-      <p:sp>
-        <p:nvSpPr>
-          <p:cNvPr id="3" name="Content Placeholder 2"/>
-          <p:cNvSpPr>
-            <a:spLocks noGrp="1"/>
-          </p:cNvSpPr>
-          <p:nvPr>
-            <p:ph idx="1"/>
-          </p:nvPr>
-        </p:nvSpPr>
-        <p:spPr/>
-        <p:txBody>
-          <a:bodyPr/>
-          <a:lstStyle/>
-          <a:p>
-            <a:endParaRPr lang="vi-VN"/>
-          </a:p>
-        </p:txBody>
-      </p:sp>
-    </p:spTree>
-    <p:extLst>
-      <p:ext uri="{BB962C8B-B14F-4D97-AF65-F5344CB8AC3E}">
-        <p14:creationId xmlns:p14="http://schemas.microsoft.com/office/powerpoint/2010/main" val="2264784855"/>
-      </p:ext>
-    </p:extLst>
-  </p:cSld>
-  <p:clrMapOvr>
-    <a:masterClrMapping/>
-  </p:clrMapOvr>
-</p:sld>
-</file>
-
-<file path=ppt/slides/slide5.xml><?xml version="1.0" encoding="utf-8"?>
-<p:sld xmlns:a="http://schemas.openxmlformats.org/drawingml/2006/main" xmlns:r="http://schemas.openxmlformats.org/officeDocument/2006/relationships" xmlns:p="http://schemas.openxmlformats.org/presentationml/2006/main">
-  <p:cSld>
-    <p:spTree>
-      <p:nvGrpSpPr>
-        <p:cNvPr id="1" name=""/>
-        <p:cNvGrpSpPr/>
-        <p:nvPr/>
-      </p:nvGrpSpPr>
-      <p:grpSpPr>
-        <a:xfrm>
-          <a:off x="0" y="0"/>
-          <a:ext cx="0" cy="0"/>
-          <a:chOff x="0" y="0"/>
-          <a:chExt cx="0" cy="0"/>
-        </a:xfrm>
-      </p:grpSpPr>
-      <p:sp>
-        <p:nvSpPr>
-          <p:cNvPr id="2" name="Title 1"/>
-          <p:cNvSpPr>
-            <a:spLocks noGrp="1"/>
-          </p:cNvSpPr>
-          <p:nvPr>
-            <p:ph type="title"/>
-          </p:nvPr>
-        </p:nvSpPr>
-        <p:spPr/>
-        <p:txBody>
-          <a:bodyPr/>
-          <a:lstStyle/>
-          <a:p>
-            <a:endParaRPr lang="vi-VN"/>
-          </a:p>
-        </p:txBody>
-      </p:sp>
-      <p:sp>
-        <p:nvSpPr>
-          <p:cNvPr id="3" name="Content Placeholder 2"/>
-          <p:cNvSpPr>
-            <a:spLocks noGrp="1"/>
-          </p:cNvSpPr>
-          <p:nvPr>
-            <p:ph idx="1"/>
-          </p:nvPr>
-        </p:nvSpPr>
-        <p:spPr/>
-        <p:txBody>
-          <a:bodyPr/>
-          <a:lstStyle/>
-          <a:p>
-            <a:endParaRPr lang="vi-VN"/>
-          </a:p>
-        </p:txBody>
-      </p:sp>
-    </p:spTree>
-    <p:extLst>
-      <p:ext uri="{BB962C8B-B14F-4D97-AF65-F5344CB8AC3E}">
-        <p14:creationId xmlns:p14="http://schemas.microsoft.com/office/powerpoint/2010/main" val="1635460706"/>
-      </p:ext>
-    </p:extLst>
-  </p:cSld>
-  <p:clrMapOvr>
-    <a:masterClrMapping/>
-  </p:clrMapOvr>
-</p:sld>
-</file>
-
-<file path=ppt/slides/slide6.xml><?xml version="1.0" encoding="utf-8"?>
-<p:sld xmlns:a="http://schemas.openxmlformats.org/drawingml/2006/main" xmlns:r="http://schemas.openxmlformats.org/officeDocument/2006/relationships" xmlns:p="http://schemas.openxmlformats.org/presentationml/2006/main">
-  <p:cSld>
-    <p:spTree>
-      <p:nvGrpSpPr>
-        <p:cNvPr id="1" name=""/>
-        <p:cNvGrpSpPr/>
-        <p:nvPr/>
-      </p:nvGrpSpPr>
-      <p:grpSpPr>
-        <a:xfrm>
-          <a:off x="0" y="0"/>
-          <a:ext cx="0" cy="0"/>
-          <a:chOff x="0" y="0"/>
-          <a:chExt cx="0" cy="0"/>
-        </a:xfrm>
-      </p:grpSpPr>
-      <p:sp>
-        <p:nvSpPr>
-          <p:cNvPr id="2" name="Title 1">
-            <a:extLst>
-              <a:ext uri="{FF2B5EF4-FFF2-40B4-BE49-F238E27FC236}">
-                <a16:creationId xmlns="" xmlns:a16="http://schemas.microsoft.com/office/drawing/2014/main" id="{ACC53C67-8169-807E-DC40-4ED05DAB3098}"/>
-              </a:ext>
-            </a:extLst>
-          </p:cNvPr>
-          <p:cNvSpPr>
-            <a:spLocks noGrp="1"/>
-          </p:cNvSpPr>
-          <p:nvPr>
-            <p:ph type="title"/>
-          </p:nvPr>
-        </p:nvSpPr>
-        <p:spPr>
-          <a:xfrm>
-            <a:off x="7448204" y="365125"/>
-            <a:ext cx="3374967" cy="2394700"/>
-          </a:xfrm>
-          <a:prstGeom prst="hexagon">
-            <a:avLst/>
-          </a:prstGeom>
-          <a:ln/>
-        </p:spPr>
-        <p:style>
-          <a:lnRef idx="2">
-            <a:schemeClr val="dk1">
-              <a:shade val="50000"/>
-            </a:schemeClr>
-          </a:lnRef>
-          <a:fillRef idx="1">
-            <a:schemeClr val="dk1"/>
-          </a:fillRef>
-          <a:effectRef idx="0">
-            <a:schemeClr val="dk1"/>
-          </a:effectRef>
-          <a:fontRef idx="minor">
-            <a:schemeClr val="lt1"/>
-          </a:fontRef>
-        </p:style>
-        <p:txBody>
-          <a:bodyPr>
-            <a:normAutofit fontScale="90000"/>
-          </a:bodyPr>
-          <a:lstStyle/>
-          <a:p>
-            <a:pPr lvl="0" algn="ctr"/>
-            <a:r>
-              <a:rPr lang="en-US" dirty="0"/>
-              <a:t>Frequent Flyer </a:t>
-            </a:r>
-            <a:r>
-              <a:rPr lang="en-US" dirty="0" smtClean="0"/>
-              <a:t>Rewards</a:t>
-            </a:r>
-            <a:endParaRPr lang="en-US" dirty="0"/>
-          </a:p>
-        </p:txBody>
-      </p:sp>
-      <p:pic>
-        <p:nvPicPr>
-          <p:cNvPr id="1028" name="Picture 4" descr="Cách Thức Cộng Dặm - Khách Hàng Thường Xuyên | Vietnam Airlines"/>
-          <p:cNvPicPr>
-            <a:picLocks noChangeAspect="1" noChangeArrowheads="1"/>
-          </p:cNvPicPr>
-          <p:nvPr/>
-        </p:nvPicPr>
-        <p:blipFill>
-          <a:blip r:embed="rId2" cstate="print">
-            <a:extLst>
-              <a:ext uri="{28A0092B-C50C-407E-A947-70E740481C1C}">
-                <a14:useLocalDpi xmlns:a14="http://schemas.microsoft.com/office/drawing/2010/main" val="0"/>
-              </a:ext>
-            </a:extLst>
-          </a:blip>
-          <a:srcRect/>
-          <a:stretch>
-            <a:fillRect/>
-          </a:stretch>
-        </p:blipFill>
-        <p:spPr bwMode="auto">
-          <a:xfrm>
-            <a:off x="9565583" y="5641414"/>
-            <a:ext cx="2155363" cy="737134"/>
-          </a:xfrm>
-          <a:prstGeom prst="rect">
-            <a:avLst/>
-          </a:prstGeom>
-          <a:noFill/>
-          <a:extLst>
-            <a:ext uri="{909E8E84-426E-40DD-AFC4-6F175D3DCCD1}">
-              <a14:hiddenFill xmlns:a14="http://schemas.microsoft.com/office/drawing/2010/main">
-                <a:solidFill>
-                  <a:srgbClr val="FFFFFF"/>
-                </a:solidFill>
-              </a14:hiddenFill>
-            </a:ext>
-          </a:extLst>
-        </p:spPr>
-      </p:pic>
-      <p:sp>
-        <p:nvSpPr>
-          <p:cNvPr id="7" name="Content Placeholder 6"/>
-          <p:cNvSpPr>
-            <a:spLocks noGrp="1"/>
-          </p:cNvSpPr>
-          <p:nvPr>
-            <p:ph idx="1"/>
-          </p:nvPr>
-        </p:nvSpPr>
-        <p:spPr>
-          <a:xfrm>
-            <a:off x="838200" y="1825625"/>
-            <a:ext cx="6610004" cy="2912630"/>
-          </a:xfrm>
-          <a:prstGeom prst="cloudCallout">
-            <a:avLst/>
-          </a:prstGeom>
-        </p:spPr>
-        <p:style>
-          <a:lnRef idx="2">
-            <a:schemeClr val="accent1">
-              <a:shade val="50000"/>
-            </a:schemeClr>
-          </a:lnRef>
-          <a:fillRef idx="1">
-            <a:schemeClr val="accent1"/>
-          </a:fillRef>
-          <a:effectRef idx="0">
-            <a:schemeClr val="accent1"/>
-          </a:effectRef>
-          <a:fontRef idx="minor">
-            <a:schemeClr val="lt1"/>
-          </a:fontRef>
-        </p:style>
-        <p:txBody>
-          <a:bodyPr rtlCol="0" anchor="ctr"/>
-          <a:lstStyle/>
-          <a:p>
-            <a:endParaRPr lang="vi-VN"/>
-          </a:p>
-        </p:txBody>
-      </p:sp>
-    </p:spTree>
-    <p:extLst>
-      <p:ext uri="{BB962C8B-B14F-4D97-AF65-F5344CB8AC3E}">
-        <p14:creationId xmlns:p14="http://schemas.microsoft.com/office/powerpoint/2010/main" val="1672337725"/>
-      </p:ext>
-    </p:extLst>
-  </p:cSld>
-  <p:clrMapOvr>
-    <a:masterClrMapping/>
-  </p:clrMapOvr>
-</p:sld>
-</file>
-
-<file path=ppt/slides/slide7.xml><?xml version="1.0" encoding="utf-8"?>
-<p:sld xmlns:a="http://schemas.openxmlformats.org/drawingml/2006/main" xmlns:r="http://schemas.openxmlformats.org/officeDocument/2006/relationships" xmlns:p="http://schemas.openxmlformats.org/presentationml/2006/main">
-  <p:cSld>
-    <p:spTree>
-      <p:nvGrpSpPr>
-        <p:cNvPr id="1" name=""/>
-        <p:cNvGrpSpPr/>
-        <p:nvPr/>
-      </p:nvGrpSpPr>
-      <p:grpSpPr>
-        <a:xfrm>
-          <a:off x="0" y="0"/>
-          <a:ext cx="0" cy="0"/>
-          <a:chOff x="0" y="0"/>
-          <a:chExt cx="0" cy="0"/>
-        </a:xfrm>
-      </p:grpSpPr>
-      <p:sp>
-        <p:nvSpPr>
-          <p:cNvPr id="2" name="Title 1">
-            <a:extLst>
-              <a:ext uri="{FF2B5EF4-FFF2-40B4-BE49-F238E27FC236}">
-                <a16:creationId xmlns="" xmlns:a16="http://schemas.microsoft.com/office/drawing/2014/main" id="{DC93D0B4-1172-7444-411D-1981DBB3D3E6}"/>
-              </a:ext>
-            </a:extLst>
-          </p:cNvPr>
-          <p:cNvSpPr>
-            <a:spLocks noGrp="1"/>
-          </p:cNvSpPr>
-          <p:nvPr>
-            <p:ph type="title"/>
-          </p:nvPr>
-        </p:nvSpPr>
-        <p:spPr/>
-        <p:txBody>
-          <a:bodyPr/>
-          <a:lstStyle/>
-          <a:p>
-            <a:r>
-              <a:rPr lang="en-US" dirty="0"/>
-              <a:t>Become a Frequent Flyer</a:t>
-            </a:r>
-          </a:p>
-        </p:txBody>
-      </p:sp>
-      <p:sp>
-        <p:nvSpPr>
-          <p:cNvPr id="3" name="Content Placeholder 2">
-            <a:extLst>
-              <a:ext uri="{FF2B5EF4-FFF2-40B4-BE49-F238E27FC236}">
-                <a16:creationId xmlns="" xmlns:a16="http://schemas.microsoft.com/office/drawing/2014/main" id="{0F0A4270-2254-871C-5363-4194CA2A6226}"/>
-              </a:ext>
-            </a:extLst>
-          </p:cNvPr>
-          <p:cNvSpPr>
-            <a:spLocks noGrp="1"/>
-          </p:cNvSpPr>
-          <p:nvPr>
-            <p:ph idx="1"/>
-          </p:nvPr>
-        </p:nvSpPr>
-        <p:spPr>
-          <a:xfrm>
-            <a:off x="838200" y="1457678"/>
-            <a:ext cx="4388556" cy="466019"/>
-          </a:xfrm>
-        </p:spPr>
-        <p:txBody>
-          <a:bodyPr>
-            <a:normAutofit lnSpcReduction="10000"/>
-          </a:bodyPr>
-          <a:lstStyle/>
-          <a:p>
-            <a:pPr marL="0" indent="0">
-              <a:buNone/>
-            </a:pPr>
-            <a:r>
-              <a:rPr lang="en-US" dirty="0"/>
-              <a:t>Registration is easy and fast</a:t>
-            </a:r>
-          </a:p>
-        </p:txBody>
-      </p:sp>
-      <p:sp>
-        <p:nvSpPr>
-          <p:cNvPr id="4" name="Cloud 3">
-            <a:extLst>
-              <a:ext uri="{FF2B5EF4-FFF2-40B4-BE49-F238E27FC236}">
-                <a16:creationId xmlns="" xmlns:a16="http://schemas.microsoft.com/office/drawing/2014/main" id="{FBAF7DF1-9027-AF36-7082-1644A4250A15}"/>
-              </a:ext>
-            </a:extLst>
-          </p:cNvPr>
-          <p:cNvSpPr/>
-          <p:nvPr/>
-        </p:nvSpPr>
-        <p:spPr>
-          <a:xfrm>
-            <a:off x="838200" y="2348088"/>
-            <a:ext cx="5303520" cy="1828800"/>
-          </a:xfrm>
-          <a:prstGeom prst="cloud">
-            <a:avLst/>
-          </a:prstGeom>
-        </p:spPr>
-        <p:style>
-          <a:lnRef idx="2">
-            <a:schemeClr val="accent1"/>
-          </a:lnRef>
-          <a:fillRef idx="1">
-            <a:schemeClr val="lt1"/>
-          </a:fillRef>
-          <a:effectRef idx="0">
-            <a:schemeClr val="accent1"/>
-          </a:effectRef>
-          <a:fontRef idx="minor">
-            <a:schemeClr val="dk1"/>
-          </a:fontRef>
-        </p:style>
-        <p:txBody>
-          <a:bodyPr rtlCol="0" anchor="ctr"/>
-          <a:lstStyle/>
-          <a:p>
-            <a:pPr algn="ctr"/>
-            <a:r>
-              <a:rPr lang="en-US" dirty="0"/>
-              <a:t>Register for the program at </a:t>
-            </a:r>
-            <a:r>
-              <a:rPr lang="en-US" dirty="0">
-                <a:hlinkClick r:id="rId2"/>
-              </a:rPr>
-              <a:t>www.blueyonderairlines.com</a:t>
-            </a:r>
-            <a:r>
-              <a:rPr lang="en-US" dirty="0"/>
-              <a:t> </a:t>
-            </a:r>
-          </a:p>
-        </p:txBody>
-      </p:sp>
-      <p:sp>
-        <p:nvSpPr>
-          <p:cNvPr id="8" name="Cloud 7">
-            <a:extLst>
-              <a:ext uri="{FF2B5EF4-FFF2-40B4-BE49-F238E27FC236}">
-                <a16:creationId xmlns="" xmlns:a16="http://schemas.microsoft.com/office/drawing/2014/main" id="{B40F1916-3DE3-8EEC-A88B-77D73416552F}"/>
-              </a:ext>
-            </a:extLst>
-          </p:cNvPr>
-          <p:cNvSpPr/>
-          <p:nvPr/>
-        </p:nvSpPr>
-        <p:spPr>
-          <a:xfrm>
-            <a:off x="3567289" y="3429000"/>
-            <a:ext cx="5303520" cy="1828800"/>
-          </a:xfrm>
-          <a:prstGeom prst="cloud">
-            <a:avLst/>
-          </a:prstGeom>
-        </p:spPr>
-        <p:style>
-          <a:lnRef idx="2">
-            <a:schemeClr val="accent1"/>
-          </a:lnRef>
-          <a:fillRef idx="1">
-            <a:schemeClr val="lt1"/>
-          </a:fillRef>
-          <a:effectRef idx="0">
-            <a:schemeClr val="accent1"/>
-          </a:effectRef>
-          <a:fontRef idx="minor">
-            <a:schemeClr val="dk1"/>
-          </a:fontRef>
-        </p:style>
-        <p:txBody>
-          <a:bodyPr rtlCol="0" anchor="ctr"/>
-          <a:lstStyle/>
-          <a:p>
-            <a:pPr algn="ctr"/>
-            <a:r>
-              <a:rPr lang="en-US" dirty="0"/>
-              <a:t>Connect your frequent flyer number to your purchases</a:t>
-            </a:r>
-          </a:p>
-        </p:txBody>
-      </p:sp>
-      <p:sp>
-        <p:nvSpPr>
-          <p:cNvPr id="9" name="Cloud 8">
-            <a:extLst>
-              <a:ext uri="{FF2B5EF4-FFF2-40B4-BE49-F238E27FC236}">
-                <a16:creationId xmlns="" xmlns:a16="http://schemas.microsoft.com/office/drawing/2014/main" id="{C4CE8388-81B7-5452-9F34-5F7588290934}"/>
-              </a:ext>
-            </a:extLst>
-          </p:cNvPr>
-          <p:cNvSpPr/>
-          <p:nvPr/>
-        </p:nvSpPr>
-        <p:spPr>
-          <a:xfrm>
-            <a:off x="6461760" y="4590345"/>
-            <a:ext cx="3431822" cy="1334910"/>
-          </a:xfrm>
-          <a:prstGeom prst="cloud">
-            <a:avLst/>
-          </a:prstGeom>
-        </p:spPr>
-        <p:style>
-          <a:lnRef idx="2">
-            <a:schemeClr val="accent1"/>
-          </a:lnRef>
-          <a:fillRef idx="1">
-            <a:schemeClr val="lt1"/>
-          </a:fillRef>
-          <a:effectRef idx="0">
-            <a:schemeClr val="accent1"/>
-          </a:effectRef>
-          <a:fontRef idx="minor">
-            <a:schemeClr val="dk1"/>
-          </a:fontRef>
-        </p:style>
-        <p:txBody>
-          <a:bodyPr rtlCol="0" anchor="ctr"/>
-          <a:lstStyle/>
-          <a:p>
-            <a:pPr algn="ctr"/>
-            <a:r>
-              <a:rPr lang="en-US" dirty="0"/>
-              <a:t>Accumulate points and use them for your future trips</a:t>
-            </a:r>
-          </a:p>
-        </p:txBody>
-      </p:sp>
-    </p:spTree>
-    <p:extLst>
-      <p:ext uri="{BB962C8B-B14F-4D97-AF65-F5344CB8AC3E}">
-        <p14:creationId xmlns:p14="http://schemas.microsoft.com/office/powerpoint/2010/main" val="4246887344"/>
-      </p:ext>
-    </p:extLst>
-  </p:cSld>
-  <p:clrMapOvr>
-    <a:masterClrMapping/>
-  </p:clrMapOvr>
-</p:sld>
-</file>
-
-<file path=ppt/slides/slide8.xml><?xml version="1.0" encoding="utf-8"?>
-<p:sld xmlns:a="http://schemas.openxmlformats.org/drawingml/2006/main" xmlns:r="http://schemas.openxmlformats.org/officeDocument/2006/relationships" xmlns:p="http://schemas.openxmlformats.org/presentationml/2006/main">
-  <p:cSld>
-    <p:spTree>
-      <p:nvGrpSpPr>
-        <p:cNvPr id="1" name=""/>
-        <p:cNvGrpSpPr/>
-        <p:nvPr/>
-      </p:nvGrpSpPr>
-      <p:grpSpPr>
-        <a:xfrm>
-          <a:off x="0" y="0"/>
-          <a:ext cx="0" cy="0"/>
-          <a:chOff x="0" y="0"/>
-          <a:chExt cx="0" cy="0"/>
-        </a:xfrm>
-      </p:grpSpPr>
-      <p:sp>
-        <p:nvSpPr>
-          <p:cNvPr id="2" name="Title 1">
-            <a:extLst>
-              <a:ext uri="{FF2B5EF4-FFF2-40B4-BE49-F238E27FC236}">
-                <a16:creationId xmlns="" xmlns:a16="http://schemas.microsoft.com/office/drawing/2014/main" id="{7ECD19FD-AE8C-447E-F53C-8F943B369839}"/>
-              </a:ext>
-            </a:extLst>
-          </p:cNvPr>
-          <p:cNvSpPr>
-            <a:spLocks noGrp="1"/>
-          </p:cNvSpPr>
-          <p:nvPr>
-            <p:ph type="title"/>
-          </p:nvPr>
-        </p:nvSpPr>
-        <p:spPr/>
-        <p:txBody>
-          <a:bodyPr/>
-          <a:lstStyle/>
-          <a:p>
-            <a:r>
-              <a:rPr lang="en-US" u="sng" dirty="0"/>
-              <a:t>Frequent Flyer Points</a:t>
-            </a:r>
-          </a:p>
-        </p:txBody>
-      </p:sp>
-      <p:graphicFrame>
-        <p:nvGraphicFramePr>
-          <p:cNvPr id="4" name="Table 5">
-            <a:extLst>
-              <a:ext uri="{FF2B5EF4-FFF2-40B4-BE49-F238E27FC236}">
-                <a16:creationId xmlns="" xmlns:a16="http://schemas.microsoft.com/office/drawing/2014/main" id="{76674EEB-E872-EB5E-3002-B62FCD0E8122}"/>
+                <a16:creationId xmlns:a16="http://schemas.microsoft.com/office/drawing/2014/main" id="{76674EEB-E872-EB5E-3002-B62FCD0E8122}"/>
               </a:ext>
             </a:extLst>
           </p:cNvPr>
@@ -4546,28 +3550,28 @@
                 <a:gridCol w="2628900">
                   <a:extLst>
                     <a:ext uri="{9D8B030D-6E8A-4147-A177-3AD203B41FA5}">
-                      <a16:colId xmlns="" xmlns:a16="http://schemas.microsoft.com/office/drawing/2014/main" val="2484664336"/>
+                      <a16:colId xmlns:a16="http://schemas.microsoft.com/office/drawing/2014/main" val="2484664336"/>
                     </a:ext>
                   </a:extLst>
                 </a:gridCol>
                 <a:gridCol w="2628900">
                   <a:extLst>
                     <a:ext uri="{9D8B030D-6E8A-4147-A177-3AD203B41FA5}">
-                      <a16:colId xmlns="" xmlns:a16="http://schemas.microsoft.com/office/drawing/2014/main" val="1970591386"/>
+                      <a16:colId xmlns:a16="http://schemas.microsoft.com/office/drawing/2014/main" val="1970591386"/>
                     </a:ext>
                   </a:extLst>
                 </a:gridCol>
                 <a:gridCol w="2628900">
                   <a:extLst>
                     <a:ext uri="{9D8B030D-6E8A-4147-A177-3AD203B41FA5}">
-                      <a16:colId xmlns="" xmlns:a16="http://schemas.microsoft.com/office/drawing/2014/main" val="491054418"/>
+                      <a16:colId xmlns:a16="http://schemas.microsoft.com/office/drawing/2014/main" val="491054418"/>
                     </a:ext>
                   </a:extLst>
                 </a:gridCol>
                 <a:gridCol w="2628900">
                   <a:extLst>
                     <a:ext uri="{9D8B030D-6E8A-4147-A177-3AD203B41FA5}">
-                      <a16:colId xmlns="" xmlns:a16="http://schemas.microsoft.com/office/drawing/2014/main" val="1422605408"/>
+                      <a16:colId xmlns:a16="http://schemas.microsoft.com/office/drawing/2014/main" val="1422605408"/>
                     </a:ext>
                   </a:extLst>
                 </a:gridCol>
@@ -4616,13 +3620,8 @@
                       <a:pPr algn="ctr"/>
                       <a:r>
                         <a:rPr lang="en-US" dirty="0"/>
-                        <a:t>Average Points </a:t>
+                        <a:t>Average Points Earned</a:t>
                       </a:r>
-                      <a:r>
-                        <a:rPr lang="en-US" dirty="0" smtClean="0"/>
-                        <a:t>Earned</a:t>
-                      </a:r>
-                      <a:endParaRPr lang="en-US" dirty="0"/>
                     </a:p>
                   </a:txBody>
                   <a:tcPr/>
@@ -4643,7 +3642,7 @@
                 </a:tc>
                 <a:extLst>
                   <a:ext uri="{0D108BD9-81ED-4DB2-BD59-A6C34878D82A}">
-                    <a16:rowId xmlns="" xmlns:a16="http://schemas.microsoft.com/office/drawing/2014/main" val="74444092"/>
+                    <a16:rowId xmlns:a16="http://schemas.microsoft.com/office/drawing/2014/main" val="74444092"/>
                   </a:ext>
                 </a:extLst>
               </a:tr>
@@ -4706,7 +3705,7 @@
                 </a:tc>
                 <a:extLst>
                   <a:ext uri="{0D108BD9-81ED-4DB2-BD59-A6C34878D82A}">
-                    <a16:rowId xmlns="" xmlns:a16="http://schemas.microsoft.com/office/drawing/2014/main" val="4107305131"/>
+                    <a16:rowId xmlns:a16="http://schemas.microsoft.com/office/drawing/2014/main" val="4107305131"/>
                   </a:ext>
                 </a:extLst>
               </a:tr>
@@ -4769,7 +3768,7 @@
                 </a:tc>
                 <a:extLst>
                   <a:ext uri="{0D108BD9-81ED-4DB2-BD59-A6C34878D82A}">
-                    <a16:rowId xmlns="" xmlns:a16="http://schemas.microsoft.com/office/drawing/2014/main" val="3905305555"/>
+                    <a16:rowId xmlns:a16="http://schemas.microsoft.com/office/drawing/2014/main" val="3905305555"/>
                   </a:ext>
                 </a:extLst>
               </a:tr>
@@ -4832,7 +3831,7 @@
                 </a:tc>
                 <a:extLst>
                   <a:ext uri="{0D108BD9-81ED-4DB2-BD59-A6C34878D82A}">
-                    <a16:rowId xmlns="" xmlns:a16="http://schemas.microsoft.com/office/drawing/2014/main" val="2330023202"/>
+                    <a16:rowId xmlns:a16="http://schemas.microsoft.com/office/drawing/2014/main" val="2330023202"/>
                   </a:ext>
                 </a:extLst>
               </a:tr>
@@ -4895,7 +3894,7 @@
                 </a:tc>
                 <a:extLst>
                   <a:ext uri="{0D108BD9-81ED-4DB2-BD59-A6C34878D82A}">
-                    <a16:rowId xmlns="" xmlns:a16="http://schemas.microsoft.com/office/drawing/2014/main" val="2168646658"/>
+                    <a16:rowId xmlns:a16="http://schemas.microsoft.com/office/drawing/2014/main" val="2168646658"/>
                   </a:ext>
                 </a:extLst>
               </a:tr>
@@ -4916,10 +3915,643 @@
 </p:sld>
 </file>
 
+<file path=ppt/slides/slide3.xml><?xml version="1.0" encoding="utf-8"?>
+<p:sld xmlns:a="http://schemas.openxmlformats.org/drawingml/2006/main" xmlns:r="http://schemas.openxmlformats.org/officeDocument/2006/relationships" xmlns:p="http://schemas.openxmlformats.org/presentationml/2006/main">
+  <p:cSld>
+    <p:spTree>
+      <p:nvGrpSpPr>
+        <p:cNvPr id="1" name=""/>
+        <p:cNvGrpSpPr/>
+        <p:nvPr/>
+      </p:nvGrpSpPr>
+      <p:grpSpPr>
+        <a:xfrm>
+          <a:off x="0" y="0"/>
+          <a:ext cx="0" cy="0"/>
+          <a:chOff x="0" y="0"/>
+          <a:chExt cx="0" cy="0"/>
+        </a:xfrm>
+      </p:grpSpPr>
+      <p:sp>
+        <p:nvSpPr>
+          <p:cNvPr id="2" name="Title 1">
+            <a:extLst>
+              <a:ext uri="{FF2B5EF4-FFF2-40B4-BE49-F238E27FC236}">
+                <a16:creationId xmlns:a16="http://schemas.microsoft.com/office/drawing/2014/main" id="{28685D3B-A586-0516-2BFF-043CBACD305F}"/>
+              </a:ext>
+            </a:extLst>
+          </p:cNvPr>
+          <p:cNvSpPr>
+            <a:spLocks noGrp="1"/>
+          </p:cNvSpPr>
+          <p:nvPr>
+            <p:ph type="title"/>
+          </p:nvPr>
+        </p:nvSpPr>
+        <p:spPr/>
+        <p:txBody>
+          <a:bodyPr/>
+          <a:lstStyle/>
+          <a:p>
+            <a:endParaRPr lang="en-US"/>
+          </a:p>
+        </p:txBody>
+      </p:sp>
+      <p:sp>
+        <p:nvSpPr>
+          <p:cNvPr id="3" name="Content Placeholder 2">
+            <a:extLst>
+              <a:ext uri="{FF2B5EF4-FFF2-40B4-BE49-F238E27FC236}">
+                <a16:creationId xmlns:a16="http://schemas.microsoft.com/office/drawing/2014/main" id="{3B69B050-ACA0-5E9B-5408-F4CF1E478496}"/>
+              </a:ext>
+            </a:extLst>
+          </p:cNvPr>
+          <p:cNvSpPr>
+            <a:spLocks noGrp="1"/>
+          </p:cNvSpPr>
+          <p:nvPr>
+            <p:ph idx="1"/>
+          </p:nvPr>
+        </p:nvSpPr>
+        <p:spPr/>
+        <p:txBody>
+          <a:bodyPr/>
+          <a:lstStyle/>
+          <a:p>
+            <a:endParaRPr lang="en-US"/>
+          </a:p>
+        </p:txBody>
+      </p:sp>
+    </p:spTree>
+    <p:extLst>
+      <p:ext uri="{BB962C8B-B14F-4D97-AF65-F5344CB8AC3E}">
+        <p14:creationId xmlns:p14="http://schemas.microsoft.com/office/powerpoint/2010/main" val="631966446"/>
+      </p:ext>
+    </p:extLst>
+  </p:cSld>
+  <p:clrMapOvr>
+    <a:masterClrMapping/>
+  </p:clrMapOvr>
+</p:sld>
+</file>
+
+<file path=ppt/slides/slide4.xml><?xml version="1.0" encoding="utf-8"?>
+<p:sld xmlns:a="http://schemas.openxmlformats.org/drawingml/2006/main" xmlns:r="http://schemas.openxmlformats.org/officeDocument/2006/relationships" xmlns:p="http://schemas.openxmlformats.org/presentationml/2006/main">
+  <p:cSld>
+    <p:spTree>
+      <p:nvGrpSpPr>
+        <p:cNvPr id="1" name=""/>
+        <p:cNvGrpSpPr/>
+        <p:nvPr/>
+      </p:nvGrpSpPr>
+      <p:grpSpPr>
+        <a:xfrm>
+          <a:off x="0" y="0"/>
+          <a:ext cx="0" cy="0"/>
+          <a:chOff x="0" y="0"/>
+          <a:chExt cx="0" cy="0"/>
+        </a:xfrm>
+      </p:grpSpPr>
+      <p:sp>
+        <p:nvSpPr>
+          <p:cNvPr id="2" name="Title 1"/>
+          <p:cNvSpPr>
+            <a:spLocks noGrp="1"/>
+          </p:cNvSpPr>
+          <p:nvPr>
+            <p:ph type="title"/>
+          </p:nvPr>
+        </p:nvSpPr>
+        <p:spPr/>
+        <p:txBody>
+          <a:bodyPr/>
+          <a:lstStyle/>
+          <a:p>
+            <a:endParaRPr lang="vi-VN"/>
+          </a:p>
+        </p:txBody>
+      </p:sp>
+      <p:sp>
+        <p:nvSpPr>
+          <p:cNvPr id="3" name="Content Placeholder 2"/>
+          <p:cNvSpPr>
+            <a:spLocks noGrp="1"/>
+          </p:cNvSpPr>
+          <p:nvPr>
+            <p:ph idx="1"/>
+          </p:nvPr>
+        </p:nvSpPr>
+        <p:spPr/>
+        <p:txBody>
+          <a:bodyPr/>
+          <a:lstStyle/>
+          <a:p>
+            <a:endParaRPr lang="vi-VN"/>
+          </a:p>
+        </p:txBody>
+      </p:sp>
+    </p:spTree>
+    <p:extLst>
+      <p:ext uri="{BB962C8B-B14F-4D97-AF65-F5344CB8AC3E}">
+        <p14:creationId xmlns:p14="http://schemas.microsoft.com/office/powerpoint/2010/main" val="2264784855"/>
+      </p:ext>
+    </p:extLst>
+  </p:cSld>
+  <p:clrMapOvr>
+    <a:masterClrMapping/>
+  </p:clrMapOvr>
+</p:sld>
+</file>
+
+<file path=ppt/slides/slide5.xml><?xml version="1.0" encoding="utf-8"?>
+<p:sld xmlns:a="http://schemas.openxmlformats.org/drawingml/2006/main" xmlns:r="http://schemas.openxmlformats.org/officeDocument/2006/relationships" xmlns:p="http://schemas.openxmlformats.org/presentationml/2006/main">
+  <p:cSld>
+    <p:spTree>
+      <p:nvGrpSpPr>
+        <p:cNvPr id="1" name=""/>
+        <p:cNvGrpSpPr/>
+        <p:nvPr/>
+      </p:nvGrpSpPr>
+      <p:grpSpPr>
+        <a:xfrm>
+          <a:off x="0" y="0"/>
+          <a:ext cx="0" cy="0"/>
+          <a:chOff x="0" y="0"/>
+          <a:chExt cx="0" cy="0"/>
+        </a:xfrm>
+      </p:grpSpPr>
+      <p:sp>
+        <p:nvSpPr>
+          <p:cNvPr id="2" name="Title 1"/>
+          <p:cNvSpPr>
+            <a:spLocks noGrp="1"/>
+          </p:cNvSpPr>
+          <p:nvPr>
+            <p:ph type="title"/>
+          </p:nvPr>
+        </p:nvSpPr>
+        <p:spPr/>
+        <p:txBody>
+          <a:bodyPr/>
+          <a:lstStyle/>
+          <a:p>
+            <a:endParaRPr lang="vi-VN"/>
+          </a:p>
+        </p:txBody>
+      </p:sp>
+      <p:sp>
+        <p:nvSpPr>
+          <p:cNvPr id="3" name="Content Placeholder 2"/>
+          <p:cNvSpPr>
+            <a:spLocks noGrp="1"/>
+          </p:cNvSpPr>
+          <p:nvPr>
+            <p:ph idx="1"/>
+          </p:nvPr>
+        </p:nvSpPr>
+        <p:spPr/>
+        <p:txBody>
+          <a:bodyPr/>
+          <a:lstStyle/>
+          <a:p>
+            <a:endParaRPr lang="vi-VN"/>
+          </a:p>
+        </p:txBody>
+      </p:sp>
+    </p:spTree>
+    <p:extLst>
+      <p:ext uri="{BB962C8B-B14F-4D97-AF65-F5344CB8AC3E}">
+        <p14:creationId xmlns:p14="http://schemas.microsoft.com/office/powerpoint/2010/main" val="1635460706"/>
+      </p:ext>
+    </p:extLst>
+  </p:cSld>
+  <p:clrMapOvr>
+    <a:masterClrMapping/>
+  </p:clrMapOvr>
+</p:sld>
+</file>
+
+<file path=ppt/slides/slide6.xml><?xml version="1.0" encoding="utf-8"?>
+<p:sld xmlns:a="http://schemas.openxmlformats.org/drawingml/2006/main" xmlns:r="http://schemas.openxmlformats.org/officeDocument/2006/relationships" xmlns:p="http://schemas.openxmlformats.org/presentationml/2006/main">
+  <p:cSld>
+    <p:spTree>
+      <p:nvGrpSpPr>
+        <p:cNvPr id="1" name=""/>
+        <p:cNvGrpSpPr/>
+        <p:nvPr/>
+      </p:nvGrpSpPr>
+      <p:grpSpPr>
+        <a:xfrm>
+          <a:off x="0" y="0"/>
+          <a:ext cx="0" cy="0"/>
+          <a:chOff x="0" y="0"/>
+          <a:chExt cx="0" cy="0"/>
+        </a:xfrm>
+      </p:grpSpPr>
+      <p:sp>
+        <p:nvSpPr>
+          <p:cNvPr id="2" name="Title 1">
+            <a:extLst>
+              <a:ext uri="{FF2B5EF4-FFF2-40B4-BE49-F238E27FC236}">
+                <a16:creationId xmlns:a16="http://schemas.microsoft.com/office/drawing/2014/main" id="{ACC53C67-8169-807E-DC40-4ED05DAB3098}"/>
+              </a:ext>
+            </a:extLst>
+          </p:cNvPr>
+          <p:cNvSpPr>
+            <a:spLocks noGrp="1"/>
+          </p:cNvSpPr>
+          <p:nvPr>
+            <p:ph type="title"/>
+          </p:nvPr>
+        </p:nvSpPr>
+        <p:spPr>
+          <a:xfrm>
+            <a:off x="7448204" y="365125"/>
+            <a:ext cx="3374967" cy="2394700"/>
+          </a:xfrm>
+          <a:prstGeom prst="hexagon">
+            <a:avLst/>
+          </a:prstGeom>
+          <a:ln/>
+        </p:spPr>
+        <p:style>
+          <a:lnRef idx="2">
+            <a:schemeClr val="dk1">
+              <a:shade val="50000"/>
+            </a:schemeClr>
+          </a:lnRef>
+          <a:fillRef idx="1">
+            <a:schemeClr val="dk1"/>
+          </a:fillRef>
+          <a:effectRef idx="0">
+            <a:schemeClr val="dk1"/>
+          </a:effectRef>
+          <a:fontRef idx="minor">
+            <a:schemeClr val="lt1"/>
+          </a:fontRef>
+        </p:style>
+        <p:txBody>
+          <a:bodyPr>
+            <a:normAutofit fontScale="90000"/>
+          </a:bodyPr>
+          <a:lstStyle/>
+          <a:p>
+            <a:pPr lvl="0" algn="ctr"/>
+            <a:r>
+              <a:rPr lang="en-US" dirty="0"/>
+              <a:t>Frequent Flyer Rewards</a:t>
+            </a:r>
+          </a:p>
+        </p:txBody>
+      </p:sp>
+      <p:pic>
+        <p:nvPicPr>
+          <p:cNvPr id="1028" name="Picture 4" descr="Cách Thức Cộng Dặm - Khách Hàng Thường Xuyên | Vietnam Airlines"/>
+          <p:cNvPicPr>
+            <a:picLocks noChangeAspect="1" noChangeArrowheads="1"/>
+          </p:cNvPicPr>
+          <p:nvPr/>
+        </p:nvPicPr>
+        <p:blipFill>
+          <a:blip r:embed="rId2" cstate="print">
+            <a:extLst>
+              <a:ext uri="{28A0092B-C50C-407E-A947-70E740481C1C}">
+                <a14:useLocalDpi xmlns:a14="http://schemas.microsoft.com/office/drawing/2010/main" val="0"/>
+              </a:ext>
+            </a:extLst>
+          </a:blip>
+          <a:srcRect/>
+          <a:stretch>
+            <a:fillRect/>
+          </a:stretch>
+        </p:blipFill>
+        <p:spPr bwMode="auto">
+          <a:xfrm>
+            <a:off x="9565583" y="5641414"/>
+            <a:ext cx="2155363" cy="737134"/>
+          </a:xfrm>
+          <a:prstGeom prst="rect">
+            <a:avLst/>
+          </a:prstGeom>
+          <a:noFill/>
+          <a:extLst>
+            <a:ext uri="{909E8E84-426E-40DD-AFC4-6F175D3DCCD1}">
+              <a14:hiddenFill xmlns:a14="http://schemas.microsoft.com/office/drawing/2010/main">
+                <a:solidFill>
+                  <a:srgbClr val="FFFFFF"/>
+                </a:solidFill>
+              </a14:hiddenFill>
+            </a:ext>
+          </a:extLst>
+        </p:spPr>
+      </p:pic>
+      <p:sp>
+        <p:nvSpPr>
+          <p:cNvPr id="7" name="Content Placeholder 6"/>
+          <p:cNvSpPr>
+            <a:spLocks noGrp="1"/>
+          </p:cNvSpPr>
+          <p:nvPr>
+            <p:ph idx="1"/>
+          </p:nvPr>
+        </p:nvSpPr>
+        <p:spPr>
+          <a:xfrm>
+            <a:off x="838200" y="1825625"/>
+            <a:ext cx="6610004" cy="2912630"/>
+          </a:xfrm>
+          <a:prstGeom prst="cloudCallout">
+            <a:avLst/>
+          </a:prstGeom>
+        </p:spPr>
+        <p:style>
+          <a:lnRef idx="2">
+            <a:schemeClr val="accent1">
+              <a:shade val="50000"/>
+            </a:schemeClr>
+          </a:lnRef>
+          <a:fillRef idx="1">
+            <a:schemeClr val="accent1"/>
+          </a:fillRef>
+          <a:effectRef idx="0">
+            <a:schemeClr val="accent1"/>
+          </a:effectRef>
+          <a:fontRef idx="minor">
+            <a:schemeClr val="lt1"/>
+          </a:fontRef>
+        </p:style>
+        <p:txBody>
+          <a:bodyPr rtlCol="0" anchor="ctr"/>
+          <a:lstStyle/>
+          <a:p>
+            <a:endParaRPr lang="vi-VN"/>
+          </a:p>
+        </p:txBody>
+      </p:sp>
+    </p:spTree>
+    <p:extLst>
+      <p:ext uri="{BB962C8B-B14F-4D97-AF65-F5344CB8AC3E}">
+        <p14:creationId xmlns:p14="http://schemas.microsoft.com/office/powerpoint/2010/main" val="1672337725"/>
+      </p:ext>
+    </p:extLst>
+  </p:cSld>
+  <p:clrMapOvr>
+    <a:masterClrMapping/>
+  </p:clrMapOvr>
+</p:sld>
+</file>
+
+<file path=ppt/slides/slide7.xml><?xml version="1.0" encoding="utf-8"?>
+<p:sld xmlns:a="http://schemas.openxmlformats.org/drawingml/2006/main" xmlns:r="http://schemas.openxmlformats.org/officeDocument/2006/relationships" xmlns:p="http://schemas.openxmlformats.org/presentationml/2006/main">
+  <p:cSld>
+    <p:spTree>
+      <p:nvGrpSpPr>
+        <p:cNvPr id="1" name=""/>
+        <p:cNvGrpSpPr/>
+        <p:nvPr/>
+      </p:nvGrpSpPr>
+      <p:grpSpPr>
+        <a:xfrm>
+          <a:off x="0" y="0"/>
+          <a:ext cx="0" cy="0"/>
+          <a:chOff x="0" y="0"/>
+          <a:chExt cx="0" cy="0"/>
+        </a:xfrm>
+      </p:grpSpPr>
+      <p:sp>
+        <p:nvSpPr>
+          <p:cNvPr id="2" name="Title 1">
+            <a:extLst>
+              <a:ext uri="{FF2B5EF4-FFF2-40B4-BE49-F238E27FC236}">
+                <a16:creationId xmlns:a16="http://schemas.microsoft.com/office/drawing/2014/main" id="{DC93D0B4-1172-7444-411D-1981DBB3D3E6}"/>
+              </a:ext>
+            </a:extLst>
+          </p:cNvPr>
+          <p:cNvSpPr>
+            <a:spLocks noGrp="1"/>
+          </p:cNvSpPr>
+          <p:nvPr>
+            <p:ph type="title"/>
+          </p:nvPr>
+        </p:nvSpPr>
+        <p:spPr/>
+        <p:txBody>
+          <a:bodyPr/>
+          <a:lstStyle/>
+          <a:p>
+            <a:r>
+              <a:rPr lang="en-US" dirty="0"/>
+              <a:t>Become a Frequent Flyer</a:t>
+            </a:r>
+          </a:p>
+        </p:txBody>
+      </p:sp>
+      <p:sp>
+        <p:nvSpPr>
+          <p:cNvPr id="3" name="Content Placeholder 2">
+            <a:extLst>
+              <a:ext uri="{FF2B5EF4-FFF2-40B4-BE49-F238E27FC236}">
+                <a16:creationId xmlns:a16="http://schemas.microsoft.com/office/drawing/2014/main" id="{0F0A4270-2254-871C-5363-4194CA2A6226}"/>
+              </a:ext>
+            </a:extLst>
+          </p:cNvPr>
+          <p:cNvSpPr>
+            <a:spLocks noGrp="1"/>
+          </p:cNvSpPr>
+          <p:nvPr>
+            <p:ph idx="1"/>
+          </p:nvPr>
+        </p:nvSpPr>
+        <p:spPr>
+          <a:xfrm>
+            <a:off x="838200" y="1457678"/>
+            <a:ext cx="4388556" cy="466019"/>
+          </a:xfrm>
+        </p:spPr>
+        <p:txBody>
+          <a:bodyPr>
+            <a:normAutofit lnSpcReduction="10000"/>
+          </a:bodyPr>
+          <a:lstStyle/>
+          <a:p>
+            <a:pPr marL="0" indent="0">
+              <a:buNone/>
+            </a:pPr>
+            <a:r>
+              <a:rPr lang="en-US" dirty="0"/>
+              <a:t>Registration is easy and fast</a:t>
+            </a:r>
+          </a:p>
+        </p:txBody>
+      </p:sp>
+      <p:sp>
+        <p:nvSpPr>
+          <p:cNvPr id="4" name="Cloud 3">
+            <a:extLst>
+              <a:ext uri="{FF2B5EF4-FFF2-40B4-BE49-F238E27FC236}">
+                <a16:creationId xmlns:a16="http://schemas.microsoft.com/office/drawing/2014/main" id="{FBAF7DF1-9027-AF36-7082-1644A4250A15}"/>
+              </a:ext>
+            </a:extLst>
+          </p:cNvPr>
+          <p:cNvSpPr/>
+          <p:nvPr/>
+        </p:nvSpPr>
+        <p:spPr>
+          <a:xfrm>
+            <a:off x="838200" y="2348088"/>
+            <a:ext cx="5303520" cy="1828800"/>
+          </a:xfrm>
+          <a:prstGeom prst="cloud">
+            <a:avLst/>
+          </a:prstGeom>
+        </p:spPr>
+        <p:style>
+          <a:lnRef idx="2">
+            <a:schemeClr val="accent1"/>
+          </a:lnRef>
+          <a:fillRef idx="1">
+            <a:schemeClr val="lt1"/>
+          </a:fillRef>
+          <a:effectRef idx="0">
+            <a:schemeClr val="accent1"/>
+          </a:effectRef>
+          <a:fontRef idx="minor">
+            <a:schemeClr val="dk1"/>
+          </a:fontRef>
+        </p:style>
+        <p:txBody>
+          <a:bodyPr rtlCol="0" anchor="ctr"/>
+          <a:lstStyle/>
+          <a:p>
+            <a:pPr algn="ctr"/>
+            <a:r>
+              <a:rPr lang="en-US" dirty="0"/>
+              <a:t>Register for the program at </a:t>
+            </a:r>
+            <a:r>
+              <a:rPr lang="en-US" dirty="0">
+                <a:hlinkClick r:id="rId2"/>
+              </a:rPr>
+              <a:t>www.blueyonderairlines.com</a:t>
+            </a:r>
+            <a:r>
+              <a:rPr lang="en-US" dirty="0"/>
+              <a:t> </a:t>
+            </a:r>
+          </a:p>
+        </p:txBody>
+      </p:sp>
+      <p:sp>
+        <p:nvSpPr>
+          <p:cNvPr id="8" name="Cloud 7">
+            <a:extLst>
+              <a:ext uri="{FF2B5EF4-FFF2-40B4-BE49-F238E27FC236}">
+                <a16:creationId xmlns:a16="http://schemas.microsoft.com/office/drawing/2014/main" id="{B40F1916-3DE3-8EEC-A88B-77D73416552F}"/>
+              </a:ext>
+            </a:extLst>
+          </p:cNvPr>
+          <p:cNvSpPr/>
+          <p:nvPr/>
+        </p:nvSpPr>
+        <p:spPr>
+          <a:xfrm>
+            <a:off x="3567289" y="3429000"/>
+            <a:ext cx="5303520" cy="1828800"/>
+          </a:xfrm>
+          <a:prstGeom prst="cloud">
+            <a:avLst/>
+          </a:prstGeom>
+        </p:spPr>
+        <p:style>
+          <a:lnRef idx="2">
+            <a:schemeClr val="accent1"/>
+          </a:lnRef>
+          <a:fillRef idx="1">
+            <a:schemeClr val="lt1"/>
+          </a:fillRef>
+          <a:effectRef idx="0">
+            <a:schemeClr val="accent1"/>
+          </a:effectRef>
+          <a:fontRef idx="minor">
+            <a:schemeClr val="dk1"/>
+          </a:fontRef>
+        </p:style>
+        <p:txBody>
+          <a:bodyPr rtlCol="0" anchor="ctr"/>
+          <a:lstStyle/>
+          <a:p>
+            <a:pPr algn="ctr"/>
+            <a:r>
+              <a:rPr lang="en-US" dirty="0"/>
+              <a:t>Connect your frequent flyer number to your purchases</a:t>
+            </a:r>
+          </a:p>
+        </p:txBody>
+      </p:sp>
+      <p:sp>
+        <p:nvSpPr>
+          <p:cNvPr id="9" name="Cloud 8">
+            <a:extLst>
+              <a:ext uri="{FF2B5EF4-FFF2-40B4-BE49-F238E27FC236}">
+                <a16:creationId xmlns:a16="http://schemas.microsoft.com/office/drawing/2014/main" id="{C4CE8388-81B7-5452-9F34-5F7588290934}"/>
+              </a:ext>
+            </a:extLst>
+          </p:cNvPr>
+          <p:cNvSpPr/>
+          <p:nvPr/>
+        </p:nvSpPr>
+        <p:spPr>
+          <a:xfrm>
+            <a:off x="6461760" y="4590345"/>
+            <a:ext cx="3431822" cy="1334910"/>
+          </a:xfrm>
+          <a:prstGeom prst="cloud">
+            <a:avLst/>
+          </a:prstGeom>
+        </p:spPr>
+        <p:style>
+          <a:lnRef idx="2">
+            <a:schemeClr val="accent1"/>
+          </a:lnRef>
+          <a:fillRef idx="1">
+            <a:schemeClr val="lt1"/>
+          </a:fillRef>
+          <a:effectRef idx="0">
+            <a:schemeClr val="accent1"/>
+          </a:effectRef>
+          <a:fontRef idx="minor">
+            <a:schemeClr val="dk1"/>
+          </a:fontRef>
+        </p:style>
+        <p:txBody>
+          <a:bodyPr rtlCol="0" anchor="ctr"/>
+          <a:lstStyle/>
+          <a:p>
+            <a:pPr algn="ctr"/>
+            <a:r>
+              <a:rPr lang="en-US" dirty="0"/>
+              <a:t>Accumulate points and use them for your future trips</a:t>
+            </a:r>
+          </a:p>
+        </p:txBody>
+      </p:sp>
+    </p:spTree>
+    <p:extLst>
+      <p:ext uri="{BB962C8B-B14F-4D97-AF65-F5344CB8AC3E}">
+        <p14:creationId xmlns:p14="http://schemas.microsoft.com/office/powerpoint/2010/main" val="4246887344"/>
+      </p:ext>
+    </p:extLst>
+  </p:cSld>
+  <p:clrMapOvr>
+    <a:masterClrMapping/>
+  </p:clrMapOvr>
+</p:sld>
+</file>
+
 <file path=ppt/theme/theme1.xml><?xml version="1.0" encoding="utf-8"?>
 <a:theme xmlns:a="http://schemas.openxmlformats.org/drawingml/2006/main" name="Office Theme">
   <a:themeElements>
-    <a:clrScheme name="Office">
+    <a:clrScheme name="Custom 2">
       <a:dk1>
         <a:sysClr val="windowText" lastClr="000000"/>
       </a:dk1>
@@ -4933,7 +4565,7 @@
         <a:srgbClr val="E7E6E6"/>
       </a:lt2>
       <a:accent1>
-        <a:srgbClr val="4472C4"/>
+        <a:srgbClr val="44546A"/>
       </a:accent1>
       <a:accent2>
         <a:srgbClr val="ED7D31"/>
